--- a/docs/分布式双层可验证结构.pptx
+++ b/docs/分布式双层可验证结构.pptx
@@ -9,6 +9,8 @@
     <p:sldId id="268" r:id="rId3"/>
     <p:sldId id="269" r:id="rId4"/>
     <p:sldId id="270" r:id="rId5"/>
+    <p:sldId id="271" r:id="rId6"/>
+    <p:sldId id="272" r:id="rId7"/>
   </p:sldIdLst>
   <p:sldSz cx="12192000" cy="6858000"/>
   <p:notesSz cx="6858000" cy="9144000"/>
@@ -107,6 +109,11 @@
       </a:defRPr>
     </a:lvl9pPr>
   </p:defaultTextStyle>
+  <p:extLst>
+    <p:ext uri="{EFAFB233-063F-42B5-8137-9DF3F51BA10A}">
+      <p15:sldGuideLst xmlns:p15="http://schemas.microsoft.com/office/powerpoint/2012/main"/>
+    </p:ext>
+  </p:extLst>
 </p:presentation>
 </file>
 
@@ -257,7 +264,7 @@
           <a:p>
             <a:fld id="{6999E993-DB11-4D03-8FD2-A9C36F9DFF6A}" type="datetimeFigureOut">
               <a:rPr lang="zh-CN" altLang="en-US" smtClean="0"/>
-              <a:t>2025/8/22</a:t>
+              <a:t>2025/11/29</a:t>
             </a:fld>
             <a:endParaRPr lang="zh-CN" altLang="en-US"/>
           </a:p>
@@ -455,7 +462,7 @@
           <a:p>
             <a:fld id="{6999E993-DB11-4D03-8FD2-A9C36F9DFF6A}" type="datetimeFigureOut">
               <a:rPr lang="zh-CN" altLang="en-US" smtClean="0"/>
-              <a:t>2025/8/22</a:t>
+              <a:t>2025/11/29</a:t>
             </a:fld>
             <a:endParaRPr lang="zh-CN" altLang="en-US"/>
           </a:p>
@@ -663,7 +670,7 @@
           <a:p>
             <a:fld id="{6999E993-DB11-4D03-8FD2-A9C36F9DFF6A}" type="datetimeFigureOut">
               <a:rPr lang="zh-CN" altLang="en-US" smtClean="0"/>
-              <a:t>2025/8/22</a:t>
+              <a:t>2025/11/29</a:t>
             </a:fld>
             <a:endParaRPr lang="zh-CN" altLang="en-US"/>
           </a:p>
@@ -861,7 +868,7 @@
           <a:p>
             <a:fld id="{6999E993-DB11-4D03-8FD2-A9C36F9DFF6A}" type="datetimeFigureOut">
               <a:rPr lang="zh-CN" altLang="en-US" smtClean="0"/>
-              <a:t>2025/8/22</a:t>
+              <a:t>2025/11/29</a:t>
             </a:fld>
             <a:endParaRPr lang="zh-CN" altLang="en-US"/>
           </a:p>
@@ -1136,7 +1143,7 @@
           <a:p>
             <a:fld id="{6999E993-DB11-4D03-8FD2-A9C36F9DFF6A}" type="datetimeFigureOut">
               <a:rPr lang="zh-CN" altLang="en-US" smtClean="0"/>
-              <a:t>2025/8/22</a:t>
+              <a:t>2025/11/29</a:t>
             </a:fld>
             <a:endParaRPr lang="zh-CN" altLang="en-US"/>
           </a:p>
@@ -1401,7 +1408,7 @@
           <a:p>
             <a:fld id="{6999E993-DB11-4D03-8FD2-A9C36F9DFF6A}" type="datetimeFigureOut">
               <a:rPr lang="zh-CN" altLang="en-US" smtClean="0"/>
-              <a:t>2025/8/22</a:t>
+              <a:t>2025/11/29</a:t>
             </a:fld>
             <a:endParaRPr lang="zh-CN" altLang="en-US"/>
           </a:p>
@@ -1813,7 +1820,7 @@
           <a:p>
             <a:fld id="{6999E993-DB11-4D03-8FD2-A9C36F9DFF6A}" type="datetimeFigureOut">
               <a:rPr lang="zh-CN" altLang="en-US" smtClean="0"/>
-              <a:t>2025/8/22</a:t>
+              <a:t>2025/11/29</a:t>
             </a:fld>
             <a:endParaRPr lang="zh-CN" altLang="en-US"/>
           </a:p>
@@ -1954,7 +1961,7 @@
           <a:p>
             <a:fld id="{6999E993-DB11-4D03-8FD2-A9C36F9DFF6A}" type="datetimeFigureOut">
               <a:rPr lang="zh-CN" altLang="en-US" smtClean="0"/>
-              <a:t>2025/8/22</a:t>
+              <a:t>2025/11/29</a:t>
             </a:fld>
             <a:endParaRPr lang="zh-CN" altLang="en-US"/>
           </a:p>
@@ -2067,7 +2074,7 @@
           <a:p>
             <a:fld id="{6999E993-DB11-4D03-8FD2-A9C36F9DFF6A}" type="datetimeFigureOut">
               <a:rPr lang="zh-CN" altLang="en-US" smtClean="0"/>
-              <a:t>2025/8/22</a:t>
+              <a:t>2025/11/29</a:t>
             </a:fld>
             <a:endParaRPr lang="zh-CN" altLang="en-US"/>
           </a:p>
@@ -2378,7 +2385,7 @@
           <a:p>
             <a:fld id="{6999E993-DB11-4D03-8FD2-A9C36F9DFF6A}" type="datetimeFigureOut">
               <a:rPr lang="zh-CN" altLang="en-US" smtClean="0"/>
-              <a:t>2025/8/22</a:t>
+              <a:t>2025/11/29</a:t>
             </a:fld>
             <a:endParaRPr lang="zh-CN" altLang="en-US"/>
           </a:p>
@@ -2666,7 +2673,7 @@
           <a:p>
             <a:fld id="{6999E993-DB11-4D03-8FD2-A9C36F9DFF6A}" type="datetimeFigureOut">
               <a:rPr lang="zh-CN" altLang="en-US" smtClean="0"/>
-              <a:t>2025/8/22</a:t>
+              <a:t>2025/11/29</a:t>
             </a:fld>
             <a:endParaRPr lang="zh-CN" altLang="en-US"/>
           </a:p>
@@ -2907,7 +2914,7 @@
           <a:p>
             <a:fld id="{6999E993-DB11-4D03-8FD2-A9C36F9DFF6A}" type="datetimeFigureOut">
               <a:rPr lang="zh-CN" altLang="en-US" smtClean="0"/>
-              <a:t>2025/8/22</a:t>
+              <a:t>2025/11/29</a:t>
             </a:fld>
             <a:endParaRPr lang="zh-CN" altLang="en-US"/>
           </a:p>
@@ -5864,6 +5871,3571 @@
 </p:sld>
 </file>
 
+<file path=ppt/slides/slide5.xml><?xml version="1.0" encoding="utf-8"?>
+<p:sld xmlns:a="http://schemas.openxmlformats.org/drawingml/2006/main" xmlns:r="http://schemas.openxmlformats.org/officeDocument/2006/relationships" xmlns:p="http://schemas.openxmlformats.org/presentationml/2006/main">
+  <p:cSld>
+    <p:spTree>
+      <p:nvGrpSpPr>
+        <p:cNvPr id="1" name=""/>
+        <p:cNvGrpSpPr/>
+        <p:nvPr/>
+      </p:nvGrpSpPr>
+      <p:grpSpPr>
+        <a:xfrm>
+          <a:off x="0" y="0"/>
+          <a:ext cx="0" cy="0"/>
+          <a:chOff x="0" y="0"/>
+          <a:chExt cx="0" cy="0"/>
+        </a:xfrm>
+      </p:grpSpPr>
+      <p:sp>
+        <p:nvSpPr>
+          <p:cNvPr id="4" name="矩形 3">
+            <a:extLst>
+              <a:ext uri="{FF2B5EF4-FFF2-40B4-BE49-F238E27FC236}">
+                <a16:creationId xmlns:a16="http://schemas.microsoft.com/office/drawing/2014/main" id="{17C25819-333F-B5AB-3837-8576E34C044C}"/>
+              </a:ext>
+            </a:extLst>
+          </p:cNvPr>
+          <p:cNvSpPr/>
+          <p:nvPr/>
+        </p:nvSpPr>
+        <p:spPr>
+          <a:xfrm>
+            <a:off x="1597445" y="1013551"/>
+            <a:ext cx="2335576" cy="2677099"/>
+          </a:xfrm>
+          <a:prstGeom prst="rect">
+            <a:avLst/>
+          </a:prstGeom>
+          <a:noFill/>
+          <a:ln w="19050">
+            <a:solidFill>
+              <a:schemeClr val="tx1"/>
+            </a:solidFill>
+          </a:ln>
+        </p:spPr>
+        <p:style>
+          <a:lnRef idx="2">
+            <a:schemeClr val="accent1">
+              <a:shade val="15000"/>
+            </a:schemeClr>
+          </a:lnRef>
+          <a:fillRef idx="1">
+            <a:schemeClr val="accent1"/>
+          </a:fillRef>
+          <a:effectRef idx="0">
+            <a:schemeClr val="accent1"/>
+          </a:effectRef>
+          <a:fontRef idx="minor">
+            <a:schemeClr val="lt1"/>
+          </a:fontRef>
+        </p:style>
+        <p:txBody>
+          <a:bodyPr rtlCol="0" anchor="ctr"/>
+          <a:lstStyle/>
+          <a:p>
+            <a:pPr algn="ctr"/>
+            <a:endParaRPr lang="zh-CN" altLang="en-US"/>
+          </a:p>
+        </p:txBody>
+      </p:sp>
+      <p:sp>
+        <p:nvSpPr>
+          <p:cNvPr id="5" name="矩形 4">
+            <a:extLst>
+              <a:ext uri="{FF2B5EF4-FFF2-40B4-BE49-F238E27FC236}">
+                <a16:creationId xmlns:a16="http://schemas.microsoft.com/office/drawing/2014/main" id="{EBC26E63-0CD6-2CF3-B4DA-B392B5E132C4}"/>
+              </a:ext>
+            </a:extLst>
+          </p:cNvPr>
+          <p:cNvSpPr/>
+          <p:nvPr/>
+        </p:nvSpPr>
+        <p:spPr>
+          <a:xfrm>
+            <a:off x="6310828" y="1013551"/>
+            <a:ext cx="3516218" cy="1454227"/>
+          </a:xfrm>
+          <a:prstGeom prst="rect">
+            <a:avLst/>
+          </a:prstGeom>
+          <a:noFill/>
+          <a:ln w="19050">
+            <a:solidFill>
+              <a:schemeClr val="tx1"/>
+            </a:solidFill>
+          </a:ln>
+        </p:spPr>
+        <p:style>
+          <a:lnRef idx="2">
+            <a:schemeClr val="accent1">
+              <a:shade val="15000"/>
+            </a:schemeClr>
+          </a:lnRef>
+          <a:fillRef idx="1">
+            <a:schemeClr val="accent1"/>
+          </a:fillRef>
+          <a:effectRef idx="0">
+            <a:schemeClr val="accent1"/>
+          </a:effectRef>
+          <a:fontRef idx="minor">
+            <a:schemeClr val="lt1"/>
+          </a:fontRef>
+        </p:style>
+        <p:txBody>
+          <a:bodyPr rtlCol="0" anchor="ctr"/>
+          <a:lstStyle/>
+          <a:p>
+            <a:pPr algn="ctr"/>
+            <a:endParaRPr lang="zh-CN" altLang="en-US"/>
+          </a:p>
+        </p:txBody>
+      </p:sp>
+      <p:sp>
+        <p:nvSpPr>
+          <p:cNvPr id="6" name="矩形 5">
+            <a:extLst>
+              <a:ext uri="{FF2B5EF4-FFF2-40B4-BE49-F238E27FC236}">
+                <a16:creationId xmlns:a16="http://schemas.microsoft.com/office/drawing/2014/main" id="{45EC221A-C1D7-4710-8FEC-B2A1933CDD61}"/>
+              </a:ext>
+            </a:extLst>
+          </p:cNvPr>
+          <p:cNvSpPr/>
+          <p:nvPr/>
+        </p:nvSpPr>
+        <p:spPr>
+          <a:xfrm>
+            <a:off x="5007574" y="3249974"/>
+            <a:ext cx="1553379" cy="2594473"/>
+          </a:xfrm>
+          <a:prstGeom prst="rect">
+            <a:avLst/>
+          </a:prstGeom>
+          <a:noFill/>
+          <a:ln w="19050">
+            <a:solidFill>
+              <a:schemeClr val="tx1"/>
+            </a:solidFill>
+          </a:ln>
+        </p:spPr>
+        <p:style>
+          <a:lnRef idx="2">
+            <a:schemeClr val="accent1">
+              <a:shade val="15000"/>
+            </a:schemeClr>
+          </a:lnRef>
+          <a:fillRef idx="1">
+            <a:schemeClr val="accent1"/>
+          </a:fillRef>
+          <a:effectRef idx="0">
+            <a:schemeClr val="accent1"/>
+          </a:effectRef>
+          <a:fontRef idx="minor">
+            <a:schemeClr val="lt1"/>
+          </a:fontRef>
+        </p:style>
+        <p:txBody>
+          <a:bodyPr rtlCol="0" anchor="ctr"/>
+          <a:lstStyle/>
+          <a:p>
+            <a:pPr algn="ctr"/>
+            <a:endParaRPr lang="zh-CN" altLang="en-US"/>
+          </a:p>
+        </p:txBody>
+      </p:sp>
+      <p:sp>
+        <p:nvSpPr>
+          <p:cNvPr id="7" name="矩形 6">
+            <a:extLst>
+              <a:ext uri="{FF2B5EF4-FFF2-40B4-BE49-F238E27FC236}">
+                <a16:creationId xmlns:a16="http://schemas.microsoft.com/office/drawing/2014/main" id="{A3CB9263-FB72-ABAD-652C-402A94028AF9}"/>
+              </a:ext>
+            </a:extLst>
+          </p:cNvPr>
+          <p:cNvSpPr/>
+          <p:nvPr/>
+        </p:nvSpPr>
+        <p:spPr>
+          <a:xfrm>
+            <a:off x="7287157" y="3249975"/>
+            <a:ext cx="1553379" cy="2594473"/>
+          </a:xfrm>
+          <a:prstGeom prst="rect">
+            <a:avLst/>
+          </a:prstGeom>
+          <a:noFill/>
+          <a:ln w="19050">
+            <a:solidFill>
+              <a:schemeClr val="tx1"/>
+            </a:solidFill>
+          </a:ln>
+        </p:spPr>
+        <p:style>
+          <a:lnRef idx="2">
+            <a:schemeClr val="accent1">
+              <a:shade val="15000"/>
+            </a:schemeClr>
+          </a:lnRef>
+          <a:fillRef idx="1">
+            <a:schemeClr val="accent1"/>
+          </a:fillRef>
+          <a:effectRef idx="0">
+            <a:schemeClr val="accent1"/>
+          </a:effectRef>
+          <a:fontRef idx="minor">
+            <a:schemeClr val="lt1"/>
+          </a:fontRef>
+        </p:style>
+        <p:txBody>
+          <a:bodyPr rtlCol="0" anchor="ctr"/>
+          <a:lstStyle/>
+          <a:p>
+            <a:pPr algn="ctr"/>
+            <a:endParaRPr lang="zh-CN" altLang="en-US"/>
+          </a:p>
+        </p:txBody>
+      </p:sp>
+      <p:sp>
+        <p:nvSpPr>
+          <p:cNvPr id="8" name="矩形 7">
+            <a:extLst>
+              <a:ext uri="{FF2B5EF4-FFF2-40B4-BE49-F238E27FC236}">
+                <a16:creationId xmlns:a16="http://schemas.microsoft.com/office/drawing/2014/main" id="{C2234410-971C-A624-ED5A-BC7BDF6D212D}"/>
+              </a:ext>
+            </a:extLst>
+          </p:cNvPr>
+          <p:cNvSpPr/>
+          <p:nvPr/>
+        </p:nvSpPr>
+        <p:spPr>
+          <a:xfrm>
+            <a:off x="9508990" y="3249974"/>
+            <a:ext cx="1553379" cy="2594473"/>
+          </a:xfrm>
+          <a:prstGeom prst="rect">
+            <a:avLst/>
+          </a:prstGeom>
+          <a:noFill/>
+          <a:ln w="19050">
+            <a:solidFill>
+              <a:schemeClr val="tx1"/>
+            </a:solidFill>
+          </a:ln>
+        </p:spPr>
+        <p:style>
+          <a:lnRef idx="2">
+            <a:schemeClr val="accent1">
+              <a:shade val="15000"/>
+            </a:schemeClr>
+          </a:lnRef>
+          <a:fillRef idx="1">
+            <a:schemeClr val="accent1"/>
+          </a:fillRef>
+          <a:effectRef idx="0">
+            <a:schemeClr val="accent1"/>
+          </a:effectRef>
+          <a:fontRef idx="minor">
+            <a:schemeClr val="lt1"/>
+          </a:fontRef>
+        </p:style>
+        <p:txBody>
+          <a:bodyPr rtlCol="0" anchor="ctr"/>
+          <a:lstStyle/>
+          <a:p>
+            <a:pPr algn="ctr"/>
+            <a:endParaRPr lang="zh-CN" altLang="en-US"/>
+          </a:p>
+        </p:txBody>
+      </p:sp>
+      <p:sp>
+        <p:nvSpPr>
+          <p:cNvPr id="9" name="文本框 8">
+            <a:extLst>
+              <a:ext uri="{FF2B5EF4-FFF2-40B4-BE49-F238E27FC236}">
+                <a16:creationId xmlns:a16="http://schemas.microsoft.com/office/drawing/2014/main" id="{3254B2B3-682E-C9B5-1C8E-09F2E2C69624}"/>
+              </a:ext>
+            </a:extLst>
+          </p:cNvPr>
+          <p:cNvSpPr txBox="1"/>
+          <p:nvPr/>
+        </p:nvSpPr>
+        <p:spPr>
+          <a:xfrm>
+            <a:off x="2021594" y="1107600"/>
+            <a:ext cx="1487277" cy="369332"/>
+          </a:xfrm>
+          <a:prstGeom prst="rect">
+            <a:avLst/>
+          </a:prstGeom>
+          <a:noFill/>
+        </p:spPr>
+        <p:txBody>
+          <a:bodyPr wrap="square" rtlCol="0">
+            <a:spAutoFit/>
+          </a:bodyPr>
+          <a:lstStyle/>
+          <a:p>
+            <a:pPr algn="ctr"/>
+            <a:r>
+              <a:rPr lang="en-US" altLang="zh-CN" b="1" dirty="0"/>
+              <a:t>Client</a:t>
+            </a:r>
+            <a:endParaRPr lang="zh-CN" altLang="en-US" b="1" dirty="0"/>
+          </a:p>
+        </p:txBody>
+      </p:sp>
+      <p:sp>
+        <p:nvSpPr>
+          <p:cNvPr id="10" name="文本框 9">
+            <a:extLst>
+              <a:ext uri="{FF2B5EF4-FFF2-40B4-BE49-F238E27FC236}">
+                <a16:creationId xmlns:a16="http://schemas.microsoft.com/office/drawing/2014/main" id="{88DAC476-E8B7-7223-09E0-BABB54841191}"/>
+              </a:ext>
+            </a:extLst>
+          </p:cNvPr>
+          <p:cNvSpPr txBox="1"/>
+          <p:nvPr/>
+        </p:nvSpPr>
+        <p:spPr>
+          <a:xfrm>
+            <a:off x="7325298" y="1107600"/>
+            <a:ext cx="1487277" cy="369332"/>
+          </a:xfrm>
+          <a:prstGeom prst="rect">
+            <a:avLst/>
+          </a:prstGeom>
+          <a:noFill/>
+        </p:spPr>
+        <p:txBody>
+          <a:bodyPr wrap="square" rtlCol="0">
+            <a:spAutoFit/>
+          </a:bodyPr>
+          <a:lstStyle/>
+          <a:p>
+            <a:pPr algn="ctr"/>
+            <a:r>
+              <a:rPr lang="en-US" altLang="zh-CN" b="1" dirty="0"/>
+              <a:t>Manager</a:t>
+            </a:r>
+            <a:endParaRPr lang="zh-CN" altLang="en-US" b="1" dirty="0"/>
+          </a:p>
+        </p:txBody>
+      </p:sp>
+      <p:sp>
+        <p:nvSpPr>
+          <p:cNvPr id="11" name="文本框 10">
+            <a:extLst>
+              <a:ext uri="{FF2B5EF4-FFF2-40B4-BE49-F238E27FC236}">
+                <a16:creationId xmlns:a16="http://schemas.microsoft.com/office/drawing/2014/main" id="{EAC138B6-ED8E-EFC5-4B91-2B80CE690330}"/>
+              </a:ext>
+            </a:extLst>
+          </p:cNvPr>
+          <p:cNvSpPr txBox="1"/>
+          <p:nvPr/>
+        </p:nvSpPr>
+        <p:spPr>
+          <a:xfrm>
+            <a:off x="5040624" y="3321316"/>
+            <a:ext cx="1487277" cy="369332"/>
+          </a:xfrm>
+          <a:prstGeom prst="rect">
+            <a:avLst/>
+          </a:prstGeom>
+          <a:noFill/>
+        </p:spPr>
+        <p:txBody>
+          <a:bodyPr wrap="square" rtlCol="0">
+            <a:spAutoFit/>
+          </a:bodyPr>
+          <a:lstStyle/>
+          <a:p>
+            <a:pPr algn="ctr"/>
+            <a:r>
+              <a:rPr lang="en-US" altLang="zh-CN" b="1" dirty="0" err="1"/>
+              <a:t>Storager</a:t>
+            </a:r>
+            <a:r>
+              <a:rPr lang="en-US" altLang="zh-CN" b="1" dirty="0"/>
+              <a:t> 1</a:t>
+            </a:r>
+            <a:endParaRPr lang="zh-CN" altLang="en-US" b="1" dirty="0"/>
+          </a:p>
+        </p:txBody>
+      </p:sp>
+      <p:sp>
+        <p:nvSpPr>
+          <p:cNvPr id="12" name="文本框 11">
+            <a:extLst>
+              <a:ext uri="{FF2B5EF4-FFF2-40B4-BE49-F238E27FC236}">
+                <a16:creationId xmlns:a16="http://schemas.microsoft.com/office/drawing/2014/main" id="{FEC47EA0-B1FE-189D-F436-F68FEB35F102}"/>
+              </a:ext>
+            </a:extLst>
+          </p:cNvPr>
+          <p:cNvSpPr txBox="1"/>
+          <p:nvPr/>
+        </p:nvSpPr>
+        <p:spPr>
+          <a:xfrm>
+            <a:off x="7291332" y="3321318"/>
+            <a:ext cx="1487277" cy="369332"/>
+          </a:xfrm>
+          <a:prstGeom prst="rect">
+            <a:avLst/>
+          </a:prstGeom>
+          <a:noFill/>
+        </p:spPr>
+        <p:txBody>
+          <a:bodyPr wrap="square" rtlCol="0">
+            <a:spAutoFit/>
+          </a:bodyPr>
+          <a:lstStyle/>
+          <a:p>
+            <a:pPr algn="ctr"/>
+            <a:r>
+              <a:rPr lang="en-US" altLang="zh-CN" b="1" dirty="0" err="1"/>
+              <a:t>Storager</a:t>
+            </a:r>
+            <a:r>
+              <a:rPr lang="en-US" altLang="zh-CN" b="1" dirty="0"/>
+              <a:t> 2</a:t>
+            </a:r>
+            <a:endParaRPr lang="zh-CN" altLang="en-US" b="1" dirty="0"/>
+          </a:p>
+        </p:txBody>
+      </p:sp>
+      <p:sp>
+        <p:nvSpPr>
+          <p:cNvPr id="13" name="文本框 12">
+            <a:extLst>
+              <a:ext uri="{FF2B5EF4-FFF2-40B4-BE49-F238E27FC236}">
+                <a16:creationId xmlns:a16="http://schemas.microsoft.com/office/drawing/2014/main" id="{FD53FB0F-E279-0D18-CB30-0886C00BCFA7}"/>
+              </a:ext>
+            </a:extLst>
+          </p:cNvPr>
+          <p:cNvSpPr txBox="1"/>
+          <p:nvPr/>
+        </p:nvSpPr>
+        <p:spPr>
+          <a:xfrm>
+            <a:off x="9575092" y="3321317"/>
+            <a:ext cx="1487277" cy="369332"/>
+          </a:xfrm>
+          <a:prstGeom prst="rect">
+            <a:avLst/>
+          </a:prstGeom>
+          <a:noFill/>
+        </p:spPr>
+        <p:txBody>
+          <a:bodyPr wrap="square" rtlCol="0">
+            <a:spAutoFit/>
+          </a:bodyPr>
+          <a:lstStyle/>
+          <a:p>
+            <a:pPr algn="ctr"/>
+            <a:r>
+              <a:rPr lang="en-US" altLang="zh-CN" b="1" dirty="0" err="1"/>
+              <a:t>Storager</a:t>
+            </a:r>
+            <a:r>
+              <a:rPr lang="en-US" altLang="zh-CN" b="1" dirty="0"/>
+              <a:t> 3</a:t>
+            </a:r>
+            <a:endParaRPr lang="zh-CN" altLang="en-US" b="1" dirty="0"/>
+          </a:p>
+        </p:txBody>
+      </p:sp>
+      <p:sp>
+        <p:nvSpPr>
+          <p:cNvPr id="14" name="文本框 13">
+            <a:extLst>
+              <a:ext uri="{FF2B5EF4-FFF2-40B4-BE49-F238E27FC236}">
+                <a16:creationId xmlns:a16="http://schemas.microsoft.com/office/drawing/2014/main" id="{C0B5493E-68FD-D76C-B163-C0E96C3C5E06}"/>
+              </a:ext>
+            </a:extLst>
+          </p:cNvPr>
+          <p:cNvSpPr txBox="1"/>
+          <p:nvPr/>
+        </p:nvSpPr>
+        <p:spPr>
+          <a:xfrm>
+            <a:off x="1860457" y="1665170"/>
+            <a:ext cx="1809549" cy="369332"/>
+          </a:xfrm>
+          <a:prstGeom prst="rect">
+            <a:avLst/>
+          </a:prstGeom>
+          <a:noFill/>
+        </p:spPr>
+        <p:txBody>
+          <a:bodyPr wrap="square" rtlCol="0">
+            <a:spAutoFit/>
+          </a:bodyPr>
+          <a:lstStyle/>
+          <a:p>
+            <a:pPr algn="ctr"/>
+            <a:r>
+              <a:rPr lang="en-US" altLang="zh-CN" dirty="0"/>
+              <a:t>&lt;fid,{k1,k2,k3}&gt;</a:t>
+            </a:r>
+            <a:endParaRPr lang="zh-CN" altLang="en-US" dirty="0"/>
+          </a:p>
+        </p:txBody>
+      </p:sp>
+      <p:sp>
+        <p:nvSpPr>
+          <p:cNvPr id="15" name="文本框 14">
+            <a:extLst>
+              <a:ext uri="{FF2B5EF4-FFF2-40B4-BE49-F238E27FC236}">
+                <a16:creationId xmlns:a16="http://schemas.microsoft.com/office/drawing/2014/main" id="{E344D2D6-D0B2-82B5-0A1F-028DD67D3F5B}"/>
+              </a:ext>
+            </a:extLst>
+          </p:cNvPr>
+          <p:cNvSpPr txBox="1"/>
+          <p:nvPr/>
+        </p:nvSpPr>
+        <p:spPr>
+          <a:xfrm>
+            <a:off x="2192529" y="2400911"/>
+            <a:ext cx="1145406" cy="923330"/>
+          </a:xfrm>
+          <a:prstGeom prst="rect">
+            <a:avLst/>
+          </a:prstGeom>
+          <a:noFill/>
+        </p:spPr>
+        <p:txBody>
+          <a:bodyPr wrap="square" rtlCol="0">
+            <a:spAutoFit/>
+          </a:bodyPr>
+          <a:lstStyle/>
+          <a:p>
+            <a:pPr algn="ctr"/>
+            <a:r>
+              <a:rPr lang="en-US" altLang="zh-CN" dirty="0"/>
+              <a:t>&lt;k1,fid&gt;</a:t>
+            </a:r>
+          </a:p>
+          <a:p>
+            <a:pPr algn="ctr"/>
+            <a:r>
+              <a:rPr lang="en-US" altLang="zh-CN" dirty="0"/>
+              <a:t>&lt;k2,fid&gt;</a:t>
+            </a:r>
+          </a:p>
+          <a:p>
+            <a:pPr algn="ctr"/>
+            <a:r>
+              <a:rPr lang="en-US" altLang="zh-CN" dirty="0"/>
+              <a:t>&lt;k3,fid&gt;</a:t>
+            </a:r>
+            <a:endParaRPr lang="zh-CN" altLang="en-US" dirty="0"/>
+          </a:p>
+        </p:txBody>
+      </p:sp>
+      <p:cxnSp>
+        <p:nvCxnSpPr>
+          <p:cNvPr id="17" name="直接箭头连接符 16">
+            <a:extLst>
+              <a:ext uri="{FF2B5EF4-FFF2-40B4-BE49-F238E27FC236}">
+                <a16:creationId xmlns:a16="http://schemas.microsoft.com/office/drawing/2014/main" id="{D8674D5D-F72B-3EA6-52D1-116F1900AE2C}"/>
+              </a:ext>
+            </a:extLst>
+          </p:cNvPr>
+          <p:cNvCxnSpPr>
+            <a:stCxn id="14" idx="2"/>
+            <a:endCxn id="15" idx="0"/>
+          </p:cNvCxnSpPr>
+          <p:nvPr/>
+        </p:nvCxnSpPr>
+        <p:spPr>
+          <a:xfrm>
+            <a:off x="2765232" y="2034502"/>
+            <a:ext cx="0" cy="366409"/>
+          </a:xfrm>
+          <a:prstGeom prst="straightConnector1">
+            <a:avLst/>
+          </a:prstGeom>
+          <a:ln>
+            <a:tailEnd type="triangle"/>
+          </a:ln>
+        </p:spPr>
+        <p:style>
+          <a:lnRef idx="1">
+            <a:schemeClr val="accent1"/>
+          </a:lnRef>
+          <a:fillRef idx="0">
+            <a:schemeClr val="accent1"/>
+          </a:fillRef>
+          <a:effectRef idx="0">
+            <a:schemeClr val="accent1"/>
+          </a:effectRef>
+          <a:fontRef idx="minor">
+            <a:schemeClr val="tx1"/>
+          </a:fontRef>
+        </p:style>
+      </p:cxnSp>
+      <p:sp>
+        <p:nvSpPr>
+          <p:cNvPr id="19" name="文本框 18">
+            <a:extLst>
+              <a:ext uri="{FF2B5EF4-FFF2-40B4-BE49-F238E27FC236}">
+                <a16:creationId xmlns:a16="http://schemas.microsoft.com/office/drawing/2014/main" id="{98B339F0-6245-95B0-A2BF-6D3F7F2D428A}"/>
+              </a:ext>
+            </a:extLst>
+          </p:cNvPr>
+          <p:cNvSpPr txBox="1"/>
+          <p:nvPr/>
+        </p:nvSpPr>
+        <p:spPr>
+          <a:xfrm>
+            <a:off x="7421548" y="1703670"/>
+            <a:ext cx="1328286" cy="369332"/>
+          </a:xfrm>
+          <a:prstGeom prst="rect">
+            <a:avLst/>
+          </a:prstGeom>
+          <a:noFill/>
+        </p:spPr>
+        <p:txBody>
+          <a:bodyPr wrap="square" rtlCol="0">
+            <a:spAutoFit/>
+          </a:bodyPr>
+          <a:lstStyle/>
+          <a:p>
+            <a:pPr algn="ctr"/>
+            <a:r>
+              <a:rPr lang="en-US" altLang="zh-CN" dirty="0"/>
+              <a:t>Co-Hash</a:t>
+            </a:r>
+            <a:endParaRPr lang="zh-CN" altLang="en-US" dirty="0"/>
+          </a:p>
+        </p:txBody>
+      </p:sp>
+      <p:sp>
+        <p:nvSpPr>
+          <p:cNvPr id="20" name="文本框 19">
+            <a:extLst>
+              <a:ext uri="{FF2B5EF4-FFF2-40B4-BE49-F238E27FC236}">
+                <a16:creationId xmlns:a16="http://schemas.microsoft.com/office/drawing/2014/main" id="{02BE8C9E-C538-5DBA-58D5-083882E768A0}"/>
+              </a:ext>
+            </a:extLst>
+          </p:cNvPr>
+          <p:cNvSpPr txBox="1"/>
+          <p:nvPr/>
+        </p:nvSpPr>
+        <p:spPr>
+          <a:xfrm>
+            <a:off x="5120119" y="3761990"/>
+            <a:ext cx="1328286" cy="369332"/>
+          </a:xfrm>
+          <a:prstGeom prst="rect">
+            <a:avLst/>
+          </a:prstGeom>
+          <a:noFill/>
+        </p:spPr>
+        <p:txBody>
+          <a:bodyPr wrap="square" rtlCol="0">
+            <a:spAutoFit/>
+          </a:bodyPr>
+          <a:lstStyle/>
+          <a:p>
+            <a:pPr algn="ctr"/>
+            <a:r>
+              <a:rPr lang="en-US" altLang="zh-CN" dirty="0"/>
+              <a:t>ADSs</a:t>
+            </a:r>
+            <a:endParaRPr lang="zh-CN" altLang="en-US" dirty="0"/>
+          </a:p>
+        </p:txBody>
+      </p:sp>
+      <p:sp>
+        <p:nvSpPr>
+          <p:cNvPr id="21" name="文本框 20">
+            <a:extLst>
+              <a:ext uri="{FF2B5EF4-FFF2-40B4-BE49-F238E27FC236}">
+                <a16:creationId xmlns:a16="http://schemas.microsoft.com/office/drawing/2014/main" id="{CC65501A-9F98-B6EC-CCBD-5FCD8D0ED5FA}"/>
+              </a:ext>
+            </a:extLst>
+          </p:cNvPr>
+          <p:cNvSpPr txBox="1"/>
+          <p:nvPr/>
+        </p:nvSpPr>
+        <p:spPr>
+          <a:xfrm>
+            <a:off x="7370827" y="3761990"/>
+            <a:ext cx="1328286" cy="369332"/>
+          </a:xfrm>
+          <a:prstGeom prst="rect">
+            <a:avLst/>
+          </a:prstGeom>
+          <a:noFill/>
+        </p:spPr>
+        <p:txBody>
+          <a:bodyPr wrap="square" rtlCol="0">
+            <a:spAutoFit/>
+          </a:bodyPr>
+          <a:lstStyle/>
+          <a:p>
+            <a:pPr algn="ctr"/>
+            <a:r>
+              <a:rPr lang="en-US" altLang="zh-CN" dirty="0"/>
+              <a:t>ADSs</a:t>
+            </a:r>
+            <a:endParaRPr lang="zh-CN" altLang="en-US" dirty="0"/>
+          </a:p>
+        </p:txBody>
+      </p:sp>
+      <p:sp>
+        <p:nvSpPr>
+          <p:cNvPr id="22" name="文本框 21">
+            <a:extLst>
+              <a:ext uri="{FF2B5EF4-FFF2-40B4-BE49-F238E27FC236}">
+                <a16:creationId xmlns:a16="http://schemas.microsoft.com/office/drawing/2014/main" id="{D1875A1F-E93B-DD51-E843-C3972504E9BE}"/>
+              </a:ext>
+            </a:extLst>
+          </p:cNvPr>
+          <p:cNvSpPr txBox="1"/>
+          <p:nvPr/>
+        </p:nvSpPr>
+        <p:spPr>
+          <a:xfrm>
+            <a:off x="9621536" y="3761990"/>
+            <a:ext cx="1328286" cy="369332"/>
+          </a:xfrm>
+          <a:prstGeom prst="rect">
+            <a:avLst/>
+          </a:prstGeom>
+          <a:noFill/>
+        </p:spPr>
+        <p:txBody>
+          <a:bodyPr wrap="square" rtlCol="0">
+            <a:spAutoFit/>
+          </a:bodyPr>
+          <a:lstStyle/>
+          <a:p>
+            <a:pPr algn="ctr"/>
+            <a:r>
+              <a:rPr lang="en-US" altLang="zh-CN" dirty="0"/>
+              <a:t>ADSs</a:t>
+            </a:r>
+            <a:endParaRPr lang="zh-CN" altLang="en-US" dirty="0"/>
+          </a:p>
+        </p:txBody>
+      </p:sp>
+      <p:sp>
+        <p:nvSpPr>
+          <p:cNvPr id="23" name="文本框 22">
+            <a:extLst>
+              <a:ext uri="{FF2B5EF4-FFF2-40B4-BE49-F238E27FC236}">
+                <a16:creationId xmlns:a16="http://schemas.microsoft.com/office/drawing/2014/main" id="{39D3E788-3D5B-2570-63A4-546E29739B88}"/>
+              </a:ext>
+            </a:extLst>
+          </p:cNvPr>
+          <p:cNvSpPr txBox="1"/>
+          <p:nvPr/>
+        </p:nvSpPr>
+        <p:spPr>
+          <a:xfrm>
+            <a:off x="5207009" y="4305882"/>
+            <a:ext cx="1154510" cy="1200329"/>
+          </a:xfrm>
+          <a:prstGeom prst="rect">
+            <a:avLst/>
+          </a:prstGeom>
+          <a:noFill/>
+        </p:spPr>
+        <p:txBody>
+          <a:bodyPr wrap="square" rtlCol="0">
+            <a:spAutoFit/>
+          </a:bodyPr>
+          <a:lstStyle/>
+          <a:p>
+            <a:r>
+              <a:rPr lang="zh-CN" altLang="en-US" dirty="0"/>
+              <a:t>①</a:t>
+            </a:r>
+            <a:r>
+              <a:rPr lang="en-US" altLang="zh-CN" dirty="0"/>
+              <a:t>MPT</a:t>
+            </a:r>
+          </a:p>
+          <a:p>
+            <a:r>
+              <a:rPr lang="zh-CN" altLang="en-US" dirty="0"/>
+              <a:t>②</a:t>
+            </a:r>
+            <a:r>
+              <a:rPr lang="en-US" altLang="zh-CN" dirty="0"/>
+              <a:t>MEST</a:t>
+            </a:r>
+          </a:p>
+          <a:p>
+            <a:r>
+              <a:rPr lang="zh-CN" altLang="en-US" dirty="0"/>
+              <a:t>③</a:t>
+            </a:r>
+            <a:r>
+              <a:rPr lang="en-US" altLang="zh-CN" dirty="0" err="1"/>
+              <a:t>VChain</a:t>
+            </a:r>
+            <a:endParaRPr lang="en-US" altLang="zh-CN" dirty="0"/>
+          </a:p>
+          <a:p>
+            <a:r>
+              <a:rPr lang="zh-CN" altLang="en-US" dirty="0"/>
+              <a:t>④</a:t>
+            </a:r>
+            <a:r>
+              <a:rPr lang="en-US" altLang="zh-CN" dirty="0" err="1"/>
+              <a:t>AccTrie</a:t>
+            </a:r>
+            <a:endParaRPr lang="zh-CN" altLang="en-US" dirty="0"/>
+          </a:p>
+        </p:txBody>
+      </p:sp>
+      <p:sp>
+        <p:nvSpPr>
+          <p:cNvPr id="24" name="文本框 23">
+            <a:extLst>
+              <a:ext uri="{FF2B5EF4-FFF2-40B4-BE49-F238E27FC236}">
+                <a16:creationId xmlns:a16="http://schemas.microsoft.com/office/drawing/2014/main" id="{25F2E1D1-476E-C88D-A7C0-2291A8D1CC33}"/>
+              </a:ext>
+            </a:extLst>
+          </p:cNvPr>
+          <p:cNvSpPr txBox="1"/>
+          <p:nvPr/>
+        </p:nvSpPr>
+        <p:spPr>
+          <a:xfrm>
+            <a:off x="7457715" y="4305881"/>
+            <a:ext cx="1154510" cy="1200329"/>
+          </a:xfrm>
+          <a:prstGeom prst="rect">
+            <a:avLst/>
+          </a:prstGeom>
+          <a:noFill/>
+        </p:spPr>
+        <p:txBody>
+          <a:bodyPr wrap="square" rtlCol="0">
+            <a:spAutoFit/>
+          </a:bodyPr>
+          <a:lstStyle/>
+          <a:p>
+            <a:r>
+              <a:rPr lang="zh-CN" altLang="en-US" dirty="0"/>
+              <a:t>①</a:t>
+            </a:r>
+            <a:r>
+              <a:rPr lang="en-US" altLang="zh-CN" dirty="0"/>
+              <a:t>MPT</a:t>
+            </a:r>
+          </a:p>
+          <a:p>
+            <a:r>
+              <a:rPr lang="zh-CN" altLang="en-US" dirty="0"/>
+              <a:t>②</a:t>
+            </a:r>
+            <a:r>
+              <a:rPr lang="en-US" altLang="zh-CN" dirty="0"/>
+              <a:t>MEST</a:t>
+            </a:r>
+          </a:p>
+          <a:p>
+            <a:r>
+              <a:rPr lang="zh-CN" altLang="en-US" dirty="0"/>
+              <a:t>③</a:t>
+            </a:r>
+            <a:r>
+              <a:rPr lang="en-US" altLang="zh-CN" dirty="0" err="1"/>
+              <a:t>VChain</a:t>
+            </a:r>
+            <a:endParaRPr lang="en-US" altLang="zh-CN" dirty="0"/>
+          </a:p>
+          <a:p>
+            <a:r>
+              <a:rPr lang="zh-CN" altLang="en-US" dirty="0"/>
+              <a:t>④</a:t>
+            </a:r>
+            <a:r>
+              <a:rPr lang="en-US" altLang="zh-CN" dirty="0" err="1"/>
+              <a:t>AccTrie</a:t>
+            </a:r>
+            <a:endParaRPr lang="zh-CN" altLang="en-US" dirty="0"/>
+          </a:p>
+        </p:txBody>
+      </p:sp>
+      <p:sp>
+        <p:nvSpPr>
+          <p:cNvPr id="25" name="文本框 24">
+            <a:extLst>
+              <a:ext uri="{FF2B5EF4-FFF2-40B4-BE49-F238E27FC236}">
+                <a16:creationId xmlns:a16="http://schemas.microsoft.com/office/drawing/2014/main" id="{B36F31DC-CB5B-34E3-7763-9C75C28488AA}"/>
+              </a:ext>
+            </a:extLst>
+          </p:cNvPr>
+          <p:cNvSpPr txBox="1"/>
+          <p:nvPr/>
+        </p:nvSpPr>
+        <p:spPr>
+          <a:xfrm>
+            <a:off x="9741475" y="4305880"/>
+            <a:ext cx="1154510" cy="1200329"/>
+          </a:xfrm>
+          <a:prstGeom prst="rect">
+            <a:avLst/>
+          </a:prstGeom>
+          <a:noFill/>
+        </p:spPr>
+        <p:txBody>
+          <a:bodyPr wrap="square" rtlCol="0">
+            <a:spAutoFit/>
+          </a:bodyPr>
+          <a:lstStyle/>
+          <a:p>
+            <a:r>
+              <a:rPr lang="zh-CN" altLang="en-US" dirty="0"/>
+              <a:t>①</a:t>
+            </a:r>
+            <a:r>
+              <a:rPr lang="en-US" altLang="zh-CN" dirty="0"/>
+              <a:t>MPT</a:t>
+            </a:r>
+          </a:p>
+          <a:p>
+            <a:r>
+              <a:rPr lang="zh-CN" altLang="en-US" dirty="0"/>
+              <a:t>②</a:t>
+            </a:r>
+            <a:r>
+              <a:rPr lang="en-US" altLang="zh-CN" dirty="0"/>
+              <a:t>MEST</a:t>
+            </a:r>
+          </a:p>
+          <a:p>
+            <a:r>
+              <a:rPr lang="zh-CN" altLang="en-US" dirty="0"/>
+              <a:t>③</a:t>
+            </a:r>
+            <a:r>
+              <a:rPr lang="en-US" altLang="zh-CN" dirty="0" err="1"/>
+              <a:t>VChain</a:t>
+            </a:r>
+            <a:endParaRPr lang="en-US" altLang="zh-CN" dirty="0"/>
+          </a:p>
+          <a:p>
+            <a:r>
+              <a:rPr lang="zh-CN" altLang="en-US" dirty="0"/>
+              <a:t>④</a:t>
+            </a:r>
+            <a:r>
+              <a:rPr lang="en-US" altLang="zh-CN" dirty="0" err="1"/>
+              <a:t>AccTrie</a:t>
+            </a:r>
+            <a:endParaRPr lang="zh-CN" altLang="en-US" dirty="0"/>
+          </a:p>
+        </p:txBody>
+      </p:sp>
+      <p:cxnSp>
+        <p:nvCxnSpPr>
+          <p:cNvPr id="28" name="连接符: 曲线 27">
+            <a:extLst>
+              <a:ext uri="{FF2B5EF4-FFF2-40B4-BE49-F238E27FC236}">
+                <a16:creationId xmlns:a16="http://schemas.microsoft.com/office/drawing/2014/main" id="{6B042CDE-E1A6-3775-AAC1-C019B8E1E097}"/>
+              </a:ext>
+            </a:extLst>
+          </p:cNvPr>
+          <p:cNvCxnSpPr>
+            <a:stCxn id="4" idx="3"/>
+            <a:endCxn id="5" idx="1"/>
+          </p:cNvCxnSpPr>
+          <p:nvPr/>
+        </p:nvCxnSpPr>
+        <p:spPr>
+          <a:xfrm flipV="1">
+            <a:off x="3933021" y="1740665"/>
+            <a:ext cx="2377807" cy="611436"/>
+          </a:xfrm>
+          <a:prstGeom prst="curvedConnector3">
+            <a:avLst/>
+          </a:prstGeom>
+          <a:ln>
+            <a:headEnd type="triangle" w="med" len="med"/>
+            <a:tailEnd type="triangle" w="med" len="med"/>
+          </a:ln>
+        </p:spPr>
+        <p:style>
+          <a:lnRef idx="1">
+            <a:schemeClr val="accent1"/>
+          </a:lnRef>
+          <a:fillRef idx="0">
+            <a:schemeClr val="accent1"/>
+          </a:fillRef>
+          <a:effectRef idx="0">
+            <a:schemeClr val="accent1"/>
+          </a:effectRef>
+          <a:fontRef idx="minor">
+            <a:schemeClr val="tx1"/>
+          </a:fontRef>
+        </p:style>
+      </p:cxnSp>
+      <p:cxnSp>
+        <p:nvCxnSpPr>
+          <p:cNvPr id="30" name="连接符: 曲线 29">
+            <a:extLst>
+              <a:ext uri="{FF2B5EF4-FFF2-40B4-BE49-F238E27FC236}">
+                <a16:creationId xmlns:a16="http://schemas.microsoft.com/office/drawing/2014/main" id="{6C18F4B3-17C8-5A95-5FA2-BACD23B4D66D}"/>
+              </a:ext>
+            </a:extLst>
+          </p:cNvPr>
+          <p:cNvCxnSpPr>
+            <a:stCxn id="5" idx="2"/>
+            <a:endCxn id="6" idx="0"/>
+          </p:cNvCxnSpPr>
+          <p:nvPr/>
+        </p:nvCxnSpPr>
+        <p:spPr>
+          <a:xfrm rot="5400000">
+            <a:off x="6535503" y="1716540"/>
+            <a:ext cx="782196" cy="2284673"/>
+          </a:xfrm>
+          <a:prstGeom prst="curvedConnector3">
+            <a:avLst/>
+          </a:prstGeom>
+          <a:ln>
+            <a:headEnd type="triangle"/>
+            <a:tailEnd type="triangle"/>
+          </a:ln>
+        </p:spPr>
+        <p:style>
+          <a:lnRef idx="1">
+            <a:schemeClr val="accent1"/>
+          </a:lnRef>
+          <a:fillRef idx="0">
+            <a:schemeClr val="accent1"/>
+          </a:fillRef>
+          <a:effectRef idx="0">
+            <a:schemeClr val="accent1"/>
+          </a:effectRef>
+          <a:fontRef idx="minor">
+            <a:schemeClr val="tx1"/>
+          </a:fontRef>
+        </p:style>
+      </p:cxnSp>
+      <p:cxnSp>
+        <p:nvCxnSpPr>
+          <p:cNvPr id="31" name="连接符: 曲线 30">
+            <a:extLst>
+              <a:ext uri="{FF2B5EF4-FFF2-40B4-BE49-F238E27FC236}">
+                <a16:creationId xmlns:a16="http://schemas.microsoft.com/office/drawing/2014/main" id="{0B0DC641-2643-EDFE-B06B-299D34073547}"/>
+              </a:ext>
+            </a:extLst>
+          </p:cNvPr>
+          <p:cNvCxnSpPr>
+            <a:cxnSpLocks/>
+            <a:stCxn id="5" idx="2"/>
+            <a:endCxn id="7" idx="0"/>
+          </p:cNvCxnSpPr>
+          <p:nvPr/>
+        </p:nvCxnSpPr>
+        <p:spPr>
+          <a:xfrm rot="5400000">
+            <a:off x="7675294" y="2856331"/>
+            <a:ext cx="782197" cy="5090"/>
+          </a:xfrm>
+          <a:prstGeom prst="curvedConnector3">
+            <a:avLst>
+              <a:gd name="adj1" fmla="val 50000"/>
+            </a:avLst>
+          </a:prstGeom>
+          <a:ln>
+            <a:headEnd type="triangle"/>
+            <a:tailEnd type="triangle"/>
+          </a:ln>
+        </p:spPr>
+        <p:style>
+          <a:lnRef idx="1">
+            <a:schemeClr val="accent1"/>
+          </a:lnRef>
+          <a:fillRef idx="0">
+            <a:schemeClr val="accent1"/>
+          </a:fillRef>
+          <a:effectRef idx="0">
+            <a:schemeClr val="accent1"/>
+          </a:effectRef>
+          <a:fontRef idx="minor">
+            <a:schemeClr val="tx1"/>
+          </a:fontRef>
+        </p:style>
+      </p:cxnSp>
+      <p:cxnSp>
+        <p:nvCxnSpPr>
+          <p:cNvPr id="34" name="连接符: 曲线 33">
+            <a:extLst>
+              <a:ext uri="{FF2B5EF4-FFF2-40B4-BE49-F238E27FC236}">
+                <a16:creationId xmlns:a16="http://schemas.microsoft.com/office/drawing/2014/main" id="{6B027290-47DC-FAFE-6C78-D1F04D4D3501}"/>
+              </a:ext>
+            </a:extLst>
+          </p:cNvPr>
+          <p:cNvCxnSpPr>
+            <a:cxnSpLocks/>
+            <a:stCxn id="5" idx="2"/>
+            <a:endCxn id="8" idx="0"/>
+          </p:cNvCxnSpPr>
+          <p:nvPr/>
+        </p:nvCxnSpPr>
+        <p:spPr>
+          <a:xfrm rot="16200000" flipH="1">
+            <a:off x="8786210" y="1750504"/>
+            <a:ext cx="782196" cy="2216743"/>
+          </a:xfrm>
+          <a:prstGeom prst="curvedConnector3">
+            <a:avLst>
+              <a:gd name="adj1" fmla="val 50000"/>
+            </a:avLst>
+          </a:prstGeom>
+          <a:ln>
+            <a:headEnd type="triangle"/>
+            <a:tailEnd type="triangle"/>
+          </a:ln>
+        </p:spPr>
+        <p:style>
+          <a:lnRef idx="1">
+            <a:schemeClr val="accent1"/>
+          </a:lnRef>
+          <a:fillRef idx="0">
+            <a:schemeClr val="accent1"/>
+          </a:fillRef>
+          <a:effectRef idx="0">
+            <a:schemeClr val="accent1"/>
+          </a:effectRef>
+          <a:fontRef idx="minor">
+            <a:schemeClr val="tx1"/>
+          </a:fontRef>
+        </p:style>
+      </p:cxnSp>
+      <p:sp>
+        <p:nvSpPr>
+          <p:cNvPr id="38" name="文本框 37">
+            <a:extLst>
+              <a:ext uri="{FF2B5EF4-FFF2-40B4-BE49-F238E27FC236}">
+                <a16:creationId xmlns:a16="http://schemas.microsoft.com/office/drawing/2014/main" id="{D0C8D5D8-9CDB-40A2-B657-98A01867B881}"/>
+              </a:ext>
+            </a:extLst>
+          </p:cNvPr>
+          <p:cNvSpPr txBox="1"/>
+          <p:nvPr/>
+        </p:nvSpPr>
+        <p:spPr>
+          <a:xfrm>
+            <a:off x="1350317" y="4571286"/>
+            <a:ext cx="2829827" cy="646331"/>
+          </a:xfrm>
+          <a:prstGeom prst="rect">
+            <a:avLst/>
+          </a:prstGeom>
+          <a:noFill/>
+        </p:spPr>
+        <p:txBody>
+          <a:bodyPr wrap="square" rtlCol="0">
+            <a:spAutoFit/>
+          </a:bodyPr>
+          <a:lstStyle/>
+          <a:p>
+            <a:pPr algn="ctr"/>
+            <a:r>
+              <a:rPr lang="zh-CN" altLang="en-US" dirty="0"/>
+              <a:t>面向分布式存储系统的搜索引擎架构图</a:t>
+            </a:r>
+          </a:p>
+        </p:txBody>
+      </p:sp>
+    </p:spTree>
+    <p:extLst>
+      <p:ext uri="{BB962C8B-B14F-4D97-AF65-F5344CB8AC3E}">
+        <p14:creationId xmlns:p14="http://schemas.microsoft.com/office/powerpoint/2010/main" val="2162345964"/>
+      </p:ext>
+    </p:extLst>
+  </p:cSld>
+  <p:clrMapOvr>
+    <a:masterClrMapping/>
+  </p:clrMapOvr>
+</p:sld>
+</file>
+
+<file path=ppt/slides/slide6.xml><?xml version="1.0" encoding="utf-8"?>
+<p:sld xmlns:a="http://schemas.openxmlformats.org/drawingml/2006/main" xmlns:r="http://schemas.openxmlformats.org/officeDocument/2006/relationships" xmlns:p="http://schemas.openxmlformats.org/presentationml/2006/main">
+  <p:cSld>
+    <p:spTree>
+      <p:nvGrpSpPr>
+        <p:cNvPr id="1" name=""/>
+        <p:cNvGrpSpPr/>
+        <p:nvPr/>
+      </p:nvGrpSpPr>
+      <p:grpSpPr>
+        <a:xfrm>
+          <a:off x="0" y="0"/>
+          <a:ext cx="0" cy="0"/>
+          <a:chOff x="0" y="0"/>
+          <a:chExt cx="0" cy="0"/>
+        </a:xfrm>
+      </p:grpSpPr>
+      <p:sp>
+        <p:nvSpPr>
+          <p:cNvPr id="4" name="矩形 3">
+            <a:extLst>
+              <a:ext uri="{FF2B5EF4-FFF2-40B4-BE49-F238E27FC236}">
+                <a16:creationId xmlns:a16="http://schemas.microsoft.com/office/drawing/2014/main" id="{4CCA5212-F5AE-4A2F-31D5-DA61DF39243B}"/>
+              </a:ext>
+            </a:extLst>
+          </p:cNvPr>
+          <p:cNvSpPr/>
+          <p:nvPr/>
+        </p:nvSpPr>
+        <p:spPr>
+          <a:xfrm>
+            <a:off x="1597445" y="571764"/>
+            <a:ext cx="2335576" cy="2677099"/>
+          </a:xfrm>
+          <a:prstGeom prst="rect">
+            <a:avLst/>
+          </a:prstGeom>
+          <a:noFill/>
+          <a:ln w="19050">
+            <a:solidFill>
+              <a:schemeClr val="tx1"/>
+            </a:solidFill>
+          </a:ln>
+        </p:spPr>
+        <p:style>
+          <a:lnRef idx="2">
+            <a:schemeClr val="accent1">
+              <a:shade val="15000"/>
+            </a:schemeClr>
+          </a:lnRef>
+          <a:fillRef idx="1">
+            <a:schemeClr val="accent1"/>
+          </a:fillRef>
+          <a:effectRef idx="0">
+            <a:schemeClr val="accent1"/>
+          </a:effectRef>
+          <a:fontRef idx="minor">
+            <a:schemeClr val="lt1"/>
+          </a:fontRef>
+        </p:style>
+        <p:txBody>
+          <a:bodyPr rtlCol="0" anchor="ctr"/>
+          <a:lstStyle/>
+          <a:p>
+            <a:pPr algn="ctr"/>
+            <a:endParaRPr lang="zh-CN" altLang="en-US"/>
+          </a:p>
+        </p:txBody>
+      </p:sp>
+      <p:sp>
+        <p:nvSpPr>
+          <p:cNvPr id="5" name="矩形 4">
+            <a:extLst>
+              <a:ext uri="{FF2B5EF4-FFF2-40B4-BE49-F238E27FC236}">
+                <a16:creationId xmlns:a16="http://schemas.microsoft.com/office/drawing/2014/main" id="{5CC5BDC7-E615-BA89-04D0-AFD889CB2D8B}"/>
+              </a:ext>
+            </a:extLst>
+          </p:cNvPr>
+          <p:cNvSpPr/>
+          <p:nvPr/>
+        </p:nvSpPr>
+        <p:spPr>
+          <a:xfrm>
+            <a:off x="6310828" y="1013551"/>
+            <a:ext cx="3516218" cy="1454227"/>
+          </a:xfrm>
+          <a:prstGeom prst="rect">
+            <a:avLst/>
+          </a:prstGeom>
+          <a:noFill/>
+          <a:ln w="19050">
+            <a:solidFill>
+              <a:schemeClr val="tx1"/>
+            </a:solidFill>
+          </a:ln>
+        </p:spPr>
+        <p:style>
+          <a:lnRef idx="2">
+            <a:schemeClr val="accent1">
+              <a:shade val="15000"/>
+            </a:schemeClr>
+          </a:lnRef>
+          <a:fillRef idx="1">
+            <a:schemeClr val="accent1"/>
+          </a:fillRef>
+          <a:effectRef idx="0">
+            <a:schemeClr val="accent1"/>
+          </a:effectRef>
+          <a:fontRef idx="minor">
+            <a:schemeClr val="lt1"/>
+          </a:fontRef>
+        </p:style>
+        <p:txBody>
+          <a:bodyPr rtlCol="0" anchor="ctr"/>
+          <a:lstStyle/>
+          <a:p>
+            <a:pPr algn="ctr"/>
+            <a:endParaRPr lang="zh-CN" altLang="en-US"/>
+          </a:p>
+        </p:txBody>
+      </p:sp>
+      <p:sp>
+        <p:nvSpPr>
+          <p:cNvPr id="6" name="矩形 5">
+            <a:extLst>
+              <a:ext uri="{FF2B5EF4-FFF2-40B4-BE49-F238E27FC236}">
+                <a16:creationId xmlns:a16="http://schemas.microsoft.com/office/drawing/2014/main" id="{2E5C0DEC-D979-17E2-290E-74BD966986A7}"/>
+              </a:ext>
+            </a:extLst>
+          </p:cNvPr>
+          <p:cNvSpPr/>
+          <p:nvPr/>
+        </p:nvSpPr>
+        <p:spPr>
+          <a:xfrm>
+            <a:off x="4828854" y="3249974"/>
+            <a:ext cx="3953164" cy="2996714"/>
+          </a:xfrm>
+          <a:prstGeom prst="rect">
+            <a:avLst/>
+          </a:prstGeom>
+          <a:noFill/>
+          <a:ln w="19050">
+            <a:solidFill>
+              <a:schemeClr val="tx1"/>
+            </a:solidFill>
+          </a:ln>
+        </p:spPr>
+        <p:style>
+          <a:lnRef idx="2">
+            <a:schemeClr val="accent1">
+              <a:shade val="15000"/>
+            </a:schemeClr>
+          </a:lnRef>
+          <a:fillRef idx="1">
+            <a:schemeClr val="accent1"/>
+          </a:fillRef>
+          <a:effectRef idx="0">
+            <a:schemeClr val="accent1"/>
+          </a:effectRef>
+          <a:fontRef idx="minor">
+            <a:schemeClr val="lt1"/>
+          </a:fontRef>
+        </p:style>
+        <p:txBody>
+          <a:bodyPr rtlCol="0" anchor="ctr"/>
+          <a:lstStyle/>
+          <a:p>
+            <a:pPr algn="ctr"/>
+            <a:endParaRPr lang="zh-CN" altLang="en-US"/>
+          </a:p>
+        </p:txBody>
+      </p:sp>
+      <p:sp>
+        <p:nvSpPr>
+          <p:cNvPr id="7" name="矩形 6">
+            <a:extLst>
+              <a:ext uri="{FF2B5EF4-FFF2-40B4-BE49-F238E27FC236}">
+                <a16:creationId xmlns:a16="http://schemas.microsoft.com/office/drawing/2014/main" id="{89B453AD-880B-BDD2-49C6-274ED55E4A1D}"/>
+              </a:ext>
+            </a:extLst>
+          </p:cNvPr>
+          <p:cNvSpPr/>
+          <p:nvPr/>
+        </p:nvSpPr>
+        <p:spPr>
+          <a:xfrm>
+            <a:off x="9425166" y="3249973"/>
+            <a:ext cx="860362" cy="2996714"/>
+          </a:xfrm>
+          <a:prstGeom prst="rect">
+            <a:avLst/>
+          </a:prstGeom>
+          <a:noFill/>
+          <a:ln w="19050">
+            <a:solidFill>
+              <a:schemeClr val="tx1"/>
+            </a:solidFill>
+          </a:ln>
+        </p:spPr>
+        <p:style>
+          <a:lnRef idx="2">
+            <a:schemeClr val="accent1">
+              <a:shade val="15000"/>
+            </a:schemeClr>
+          </a:lnRef>
+          <a:fillRef idx="1">
+            <a:schemeClr val="accent1"/>
+          </a:fillRef>
+          <a:effectRef idx="0">
+            <a:schemeClr val="accent1"/>
+          </a:effectRef>
+          <a:fontRef idx="minor">
+            <a:schemeClr val="lt1"/>
+          </a:fontRef>
+        </p:style>
+        <p:txBody>
+          <a:bodyPr rtlCol="0" anchor="ctr"/>
+          <a:lstStyle/>
+          <a:p>
+            <a:pPr algn="ctr"/>
+            <a:endParaRPr lang="zh-CN" altLang="en-US"/>
+          </a:p>
+        </p:txBody>
+      </p:sp>
+      <p:sp>
+        <p:nvSpPr>
+          <p:cNvPr id="8" name="矩形 7">
+            <a:extLst>
+              <a:ext uri="{FF2B5EF4-FFF2-40B4-BE49-F238E27FC236}">
+                <a16:creationId xmlns:a16="http://schemas.microsoft.com/office/drawing/2014/main" id="{E94B84C8-DBF7-97DD-5F6A-A452771918FE}"/>
+              </a:ext>
+            </a:extLst>
+          </p:cNvPr>
+          <p:cNvSpPr/>
+          <p:nvPr/>
+        </p:nvSpPr>
+        <p:spPr>
+          <a:xfrm>
+            <a:off x="10715709" y="3249974"/>
+            <a:ext cx="860362" cy="2996713"/>
+          </a:xfrm>
+          <a:prstGeom prst="rect">
+            <a:avLst/>
+          </a:prstGeom>
+          <a:noFill/>
+          <a:ln w="19050">
+            <a:solidFill>
+              <a:schemeClr val="tx1"/>
+            </a:solidFill>
+          </a:ln>
+        </p:spPr>
+        <p:style>
+          <a:lnRef idx="2">
+            <a:schemeClr val="accent1">
+              <a:shade val="15000"/>
+            </a:schemeClr>
+          </a:lnRef>
+          <a:fillRef idx="1">
+            <a:schemeClr val="accent1"/>
+          </a:fillRef>
+          <a:effectRef idx="0">
+            <a:schemeClr val="accent1"/>
+          </a:effectRef>
+          <a:fontRef idx="minor">
+            <a:schemeClr val="lt1"/>
+          </a:fontRef>
+        </p:style>
+        <p:txBody>
+          <a:bodyPr rtlCol="0" anchor="ctr"/>
+          <a:lstStyle/>
+          <a:p>
+            <a:pPr algn="ctr"/>
+            <a:endParaRPr lang="zh-CN" altLang="en-US"/>
+          </a:p>
+        </p:txBody>
+      </p:sp>
+      <p:sp>
+        <p:nvSpPr>
+          <p:cNvPr id="9" name="文本框 8">
+            <a:extLst>
+              <a:ext uri="{FF2B5EF4-FFF2-40B4-BE49-F238E27FC236}">
+                <a16:creationId xmlns:a16="http://schemas.microsoft.com/office/drawing/2014/main" id="{CA37664A-2F36-53C7-B542-5E507DE30745}"/>
+              </a:ext>
+            </a:extLst>
+          </p:cNvPr>
+          <p:cNvSpPr txBox="1"/>
+          <p:nvPr/>
+        </p:nvSpPr>
+        <p:spPr>
+          <a:xfrm>
+            <a:off x="2021594" y="665813"/>
+            <a:ext cx="1487277" cy="369332"/>
+          </a:xfrm>
+          <a:prstGeom prst="rect">
+            <a:avLst/>
+          </a:prstGeom>
+          <a:noFill/>
+        </p:spPr>
+        <p:txBody>
+          <a:bodyPr wrap="square" rtlCol="0">
+            <a:spAutoFit/>
+          </a:bodyPr>
+          <a:lstStyle/>
+          <a:p>
+            <a:pPr algn="ctr"/>
+            <a:r>
+              <a:rPr lang="en-US" altLang="zh-CN" b="1" dirty="0"/>
+              <a:t>Client</a:t>
+            </a:r>
+            <a:endParaRPr lang="zh-CN" altLang="en-US" b="1" dirty="0"/>
+          </a:p>
+        </p:txBody>
+      </p:sp>
+      <p:sp>
+        <p:nvSpPr>
+          <p:cNvPr id="10" name="文本框 9">
+            <a:extLst>
+              <a:ext uri="{FF2B5EF4-FFF2-40B4-BE49-F238E27FC236}">
+                <a16:creationId xmlns:a16="http://schemas.microsoft.com/office/drawing/2014/main" id="{CD16A502-FD93-9867-BDF4-4618553242F5}"/>
+              </a:ext>
+            </a:extLst>
+          </p:cNvPr>
+          <p:cNvSpPr txBox="1"/>
+          <p:nvPr/>
+        </p:nvSpPr>
+        <p:spPr>
+          <a:xfrm>
+            <a:off x="7325298" y="1107600"/>
+            <a:ext cx="1487277" cy="369332"/>
+          </a:xfrm>
+          <a:prstGeom prst="rect">
+            <a:avLst/>
+          </a:prstGeom>
+          <a:noFill/>
+        </p:spPr>
+        <p:txBody>
+          <a:bodyPr wrap="square" rtlCol="0">
+            <a:spAutoFit/>
+          </a:bodyPr>
+          <a:lstStyle/>
+          <a:p>
+            <a:pPr algn="ctr"/>
+            <a:r>
+              <a:rPr lang="en-US" altLang="zh-CN" b="1" dirty="0"/>
+              <a:t>Manager</a:t>
+            </a:r>
+            <a:endParaRPr lang="zh-CN" altLang="en-US" b="1" dirty="0"/>
+          </a:p>
+        </p:txBody>
+      </p:sp>
+      <p:sp>
+        <p:nvSpPr>
+          <p:cNvPr id="11" name="文本框 10">
+            <a:extLst>
+              <a:ext uri="{FF2B5EF4-FFF2-40B4-BE49-F238E27FC236}">
+                <a16:creationId xmlns:a16="http://schemas.microsoft.com/office/drawing/2014/main" id="{35F5989C-3B16-E05D-697E-B3A816ECF94B}"/>
+              </a:ext>
+            </a:extLst>
+          </p:cNvPr>
+          <p:cNvSpPr txBox="1"/>
+          <p:nvPr/>
+        </p:nvSpPr>
+        <p:spPr>
+          <a:xfrm>
+            <a:off x="6149866" y="3290586"/>
+            <a:ext cx="1487277" cy="369332"/>
+          </a:xfrm>
+          <a:prstGeom prst="rect">
+            <a:avLst/>
+          </a:prstGeom>
+          <a:noFill/>
+        </p:spPr>
+        <p:txBody>
+          <a:bodyPr wrap="square" rtlCol="0">
+            <a:spAutoFit/>
+          </a:bodyPr>
+          <a:lstStyle/>
+          <a:p>
+            <a:pPr algn="ctr"/>
+            <a:r>
+              <a:rPr lang="en-US" altLang="zh-CN" b="1" dirty="0" err="1"/>
+              <a:t>Storager</a:t>
+            </a:r>
+            <a:r>
+              <a:rPr lang="en-US" altLang="zh-CN" b="1" dirty="0"/>
+              <a:t> 1</a:t>
+            </a:r>
+            <a:endParaRPr lang="zh-CN" altLang="en-US" b="1" dirty="0"/>
+          </a:p>
+        </p:txBody>
+      </p:sp>
+      <p:sp>
+        <p:nvSpPr>
+          <p:cNvPr id="12" name="文本框 11">
+            <a:extLst>
+              <a:ext uri="{FF2B5EF4-FFF2-40B4-BE49-F238E27FC236}">
+                <a16:creationId xmlns:a16="http://schemas.microsoft.com/office/drawing/2014/main" id="{82B3BEE8-B9E0-BFD1-02F5-9C70C35819A7}"/>
+              </a:ext>
+            </a:extLst>
+          </p:cNvPr>
+          <p:cNvSpPr txBox="1"/>
+          <p:nvPr/>
+        </p:nvSpPr>
+        <p:spPr>
+          <a:xfrm rot="16200000">
+            <a:off x="9083407" y="4362542"/>
+            <a:ext cx="1487277" cy="369332"/>
+          </a:xfrm>
+          <a:prstGeom prst="rect">
+            <a:avLst/>
+          </a:prstGeom>
+          <a:noFill/>
+        </p:spPr>
+        <p:txBody>
+          <a:bodyPr wrap="square" rtlCol="0">
+            <a:spAutoFit/>
+          </a:bodyPr>
+          <a:lstStyle/>
+          <a:p>
+            <a:pPr algn="ctr"/>
+            <a:r>
+              <a:rPr lang="en-US" altLang="zh-CN" b="1" dirty="0" err="1"/>
+              <a:t>Storager</a:t>
+            </a:r>
+            <a:r>
+              <a:rPr lang="en-US" altLang="zh-CN" b="1" dirty="0"/>
+              <a:t> 2</a:t>
+            </a:r>
+            <a:endParaRPr lang="zh-CN" altLang="en-US" b="1" dirty="0"/>
+          </a:p>
+        </p:txBody>
+      </p:sp>
+      <p:sp>
+        <p:nvSpPr>
+          <p:cNvPr id="13" name="文本框 12">
+            <a:extLst>
+              <a:ext uri="{FF2B5EF4-FFF2-40B4-BE49-F238E27FC236}">
+                <a16:creationId xmlns:a16="http://schemas.microsoft.com/office/drawing/2014/main" id="{7DA11B09-DC51-9A1B-68A4-494BABEE6A49}"/>
+              </a:ext>
+            </a:extLst>
+          </p:cNvPr>
+          <p:cNvSpPr txBox="1"/>
+          <p:nvPr/>
+        </p:nvSpPr>
+        <p:spPr>
+          <a:xfrm rot="16200000">
+            <a:off x="10390772" y="4362544"/>
+            <a:ext cx="1487277" cy="369332"/>
+          </a:xfrm>
+          <a:prstGeom prst="rect">
+            <a:avLst/>
+          </a:prstGeom>
+          <a:noFill/>
+        </p:spPr>
+        <p:txBody>
+          <a:bodyPr wrap="square" rtlCol="0">
+            <a:spAutoFit/>
+          </a:bodyPr>
+          <a:lstStyle/>
+          <a:p>
+            <a:pPr algn="ctr"/>
+            <a:r>
+              <a:rPr lang="en-US" altLang="zh-CN" b="1" dirty="0" err="1"/>
+              <a:t>Storager</a:t>
+            </a:r>
+            <a:r>
+              <a:rPr lang="en-US" altLang="zh-CN" b="1" dirty="0"/>
+              <a:t> 3</a:t>
+            </a:r>
+            <a:endParaRPr lang="zh-CN" altLang="en-US" b="1" dirty="0"/>
+          </a:p>
+        </p:txBody>
+      </p:sp>
+      <p:sp>
+        <p:nvSpPr>
+          <p:cNvPr id="14" name="文本框 13">
+            <a:extLst>
+              <a:ext uri="{FF2B5EF4-FFF2-40B4-BE49-F238E27FC236}">
+                <a16:creationId xmlns:a16="http://schemas.microsoft.com/office/drawing/2014/main" id="{A4403CD3-458A-DD5A-AACC-D093E853805E}"/>
+              </a:ext>
+            </a:extLst>
+          </p:cNvPr>
+          <p:cNvSpPr txBox="1"/>
+          <p:nvPr/>
+        </p:nvSpPr>
+        <p:spPr>
+          <a:xfrm>
+            <a:off x="1860457" y="1223383"/>
+            <a:ext cx="1809549" cy="369332"/>
+          </a:xfrm>
+          <a:prstGeom prst="rect">
+            <a:avLst/>
+          </a:prstGeom>
+          <a:noFill/>
+        </p:spPr>
+        <p:txBody>
+          <a:bodyPr wrap="square" rtlCol="0">
+            <a:spAutoFit/>
+          </a:bodyPr>
+          <a:lstStyle/>
+          <a:p>
+            <a:pPr algn="ctr"/>
+            <a:r>
+              <a:rPr lang="en-US" altLang="zh-CN" dirty="0"/>
+              <a:t>&lt;fid,{k1,k2,k3}&gt;</a:t>
+            </a:r>
+            <a:endParaRPr lang="zh-CN" altLang="en-US" dirty="0"/>
+          </a:p>
+        </p:txBody>
+      </p:sp>
+      <p:sp>
+        <p:nvSpPr>
+          <p:cNvPr id="15" name="文本框 14">
+            <a:extLst>
+              <a:ext uri="{FF2B5EF4-FFF2-40B4-BE49-F238E27FC236}">
+                <a16:creationId xmlns:a16="http://schemas.microsoft.com/office/drawing/2014/main" id="{872A8491-50A8-8B08-6DF5-8CEA29ABB8B1}"/>
+              </a:ext>
+            </a:extLst>
+          </p:cNvPr>
+          <p:cNvSpPr txBox="1"/>
+          <p:nvPr/>
+        </p:nvSpPr>
+        <p:spPr>
+          <a:xfrm>
+            <a:off x="2192529" y="1959124"/>
+            <a:ext cx="1145406" cy="923330"/>
+          </a:xfrm>
+          <a:prstGeom prst="rect">
+            <a:avLst/>
+          </a:prstGeom>
+          <a:noFill/>
+        </p:spPr>
+        <p:txBody>
+          <a:bodyPr wrap="square" rtlCol="0">
+            <a:spAutoFit/>
+          </a:bodyPr>
+          <a:lstStyle/>
+          <a:p>
+            <a:pPr algn="ctr"/>
+            <a:r>
+              <a:rPr lang="en-US" altLang="zh-CN" dirty="0"/>
+              <a:t>&lt;k1,fid&gt;</a:t>
+            </a:r>
+          </a:p>
+          <a:p>
+            <a:pPr algn="ctr"/>
+            <a:r>
+              <a:rPr lang="en-US" altLang="zh-CN" dirty="0"/>
+              <a:t>&lt;k2,fid&gt;</a:t>
+            </a:r>
+          </a:p>
+          <a:p>
+            <a:pPr algn="ctr"/>
+            <a:r>
+              <a:rPr lang="en-US" altLang="zh-CN" dirty="0"/>
+              <a:t>&lt;k3,fid&gt;</a:t>
+            </a:r>
+            <a:endParaRPr lang="zh-CN" altLang="en-US" dirty="0"/>
+          </a:p>
+        </p:txBody>
+      </p:sp>
+      <p:cxnSp>
+        <p:nvCxnSpPr>
+          <p:cNvPr id="16" name="直接箭头连接符 15">
+            <a:extLst>
+              <a:ext uri="{FF2B5EF4-FFF2-40B4-BE49-F238E27FC236}">
+                <a16:creationId xmlns:a16="http://schemas.microsoft.com/office/drawing/2014/main" id="{0D1BF10C-CA0A-0C05-806B-B9B12D4A18C3}"/>
+              </a:ext>
+            </a:extLst>
+          </p:cNvPr>
+          <p:cNvCxnSpPr>
+            <a:stCxn id="14" idx="2"/>
+            <a:endCxn id="15" idx="0"/>
+          </p:cNvCxnSpPr>
+          <p:nvPr/>
+        </p:nvCxnSpPr>
+        <p:spPr>
+          <a:xfrm>
+            <a:off x="2765232" y="1592715"/>
+            <a:ext cx="0" cy="366409"/>
+          </a:xfrm>
+          <a:prstGeom prst="straightConnector1">
+            <a:avLst/>
+          </a:prstGeom>
+          <a:ln>
+            <a:tailEnd type="triangle"/>
+          </a:ln>
+        </p:spPr>
+        <p:style>
+          <a:lnRef idx="1">
+            <a:schemeClr val="accent1"/>
+          </a:lnRef>
+          <a:fillRef idx="0">
+            <a:schemeClr val="accent1"/>
+          </a:fillRef>
+          <a:effectRef idx="0">
+            <a:schemeClr val="accent1"/>
+          </a:effectRef>
+          <a:fontRef idx="minor">
+            <a:schemeClr val="tx1"/>
+          </a:fontRef>
+        </p:style>
+      </p:cxnSp>
+      <p:sp>
+        <p:nvSpPr>
+          <p:cNvPr id="17" name="文本框 16">
+            <a:extLst>
+              <a:ext uri="{FF2B5EF4-FFF2-40B4-BE49-F238E27FC236}">
+                <a16:creationId xmlns:a16="http://schemas.microsoft.com/office/drawing/2014/main" id="{539853A8-6C79-1338-1D5B-3FD933B59B78}"/>
+              </a:ext>
+            </a:extLst>
+          </p:cNvPr>
+          <p:cNvSpPr txBox="1"/>
+          <p:nvPr/>
+        </p:nvSpPr>
+        <p:spPr>
+          <a:xfrm>
+            <a:off x="7421548" y="1703670"/>
+            <a:ext cx="1328286" cy="369332"/>
+          </a:xfrm>
+          <a:prstGeom prst="rect">
+            <a:avLst/>
+          </a:prstGeom>
+          <a:noFill/>
+        </p:spPr>
+        <p:txBody>
+          <a:bodyPr wrap="square" rtlCol="0">
+            <a:spAutoFit/>
+          </a:bodyPr>
+          <a:lstStyle/>
+          <a:p>
+            <a:pPr algn="ctr"/>
+            <a:r>
+              <a:rPr lang="en-US" altLang="zh-CN" dirty="0"/>
+              <a:t>Co-Hash</a:t>
+            </a:r>
+            <a:endParaRPr lang="zh-CN" altLang="en-US" dirty="0"/>
+          </a:p>
+        </p:txBody>
+      </p:sp>
+      <p:cxnSp>
+        <p:nvCxnSpPr>
+          <p:cNvPr id="24" name="连接符: 曲线 23">
+            <a:extLst>
+              <a:ext uri="{FF2B5EF4-FFF2-40B4-BE49-F238E27FC236}">
+                <a16:creationId xmlns:a16="http://schemas.microsoft.com/office/drawing/2014/main" id="{7AD40117-C60D-7F8F-F70D-48D80EC064CB}"/>
+              </a:ext>
+            </a:extLst>
+          </p:cNvPr>
+          <p:cNvCxnSpPr>
+            <a:stCxn id="4" idx="3"/>
+            <a:endCxn id="5" idx="1"/>
+          </p:cNvCxnSpPr>
+          <p:nvPr/>
+        </p:nvCxnSpPr>
+        <p:spPr>
+          <a:xfrm flipV="1">
+            <a:off x="3933021" y="1740665"/>
+            <a:ext cx="2377807" cy="169649"/>
+          </a:xfrm>
+          <a:prstGeom prst="curvedConnector3">
+            <a:avLst/>
+          </a:prstGeom>
+          <a:ln>
+            <a:headEnd type="triangle" w="med" len="med"/>
+            <a:tailEnd type="triangle" w="med" len="med"/>
+          </a:ln>
+        </p:spPr>
+        <p:style>
+          <a:lnRef idx="1">
+            <a:schemeClr val="accent1"/>
+          </a:lnRef>
+          <a:fillRef idx="0">
+            <a:schemeClr val="accent1"/>
+          </a:fillRef>
+          <a:effectRef idx="0">
+            <a:schemeClr val="accent1"/>
+          </a:effectRef>
+          <a:fontRef idx="minor">
+            <a:schemeClr val="tx1"/>
+          </a:fontRef>
+        </p:style>
+      </p:cxnSp>
+      <p:cxnSp>
+        <p:nvCxnSpPr>
+          <p:cNvPr id="25" name="连接符: 曲线 24">
+            <a:extLst>
+              <a:ext uri="{FF2B5EF4-FFF2-40B4-BE49-F238E27FC236}">
+                <a16:creationId xmlns:a16="http://schemas.microsoft.com/office/drawing/2014/main" id="{7E897731-CE4F-47C4-F918-DCE7BAFB89A2}"/>
+              </a:ext>
+            </a:extLst>
+          </p:cNvPr>
+          <p:cNvCxnSpPr>
+            <a:cxnSpLocks/>
+            <a:stCxn id="5" idx="2"/>
+            <a:endCxn id="6" idx="0"/>
+          </p:cNvCxnSpPr>
+          <p:nvPr/>
+        </p:nvCxnSpPr>
+        <p:spPr>
+          <a:xfrm rot="5400000">
+            <a:off x="7046089" y="2227126"/>
+            <a:ext cx="782196" cy="1263501"/>
+          </a:xfrm>
+          <a:prstGeom prst="curvedConnector3">
+            <a:avLst/>
+          </a:prstGeom>
+          <a:ln>
+            <a:headEnd type="triangle"/>
+            <a:tailEnd type="triangle"/>
+          </a:ln>
+        </p:spPr>
+        <p:style>
+          <a:lnRef idx="1">
+            <a:schemeClr val="accent1"/>
+          </a:lnRef>
+          <a:fillRef idx="0">
+            <a:schemeClr val="accent1"/>
+          </a:fillRef>
+          <a:effectRef idx="0">
+            <a:schemeClr val="accent1"/>
+          </a:effectRef>
+          <a:fontRef idx="minor">
+            <a:schemeClr val="tx1"/>
+          </a:fontRef>
+        </p:style>
+      </p:cxnSp>
+      <p:cxnSp>
+        <p:nvCxnSpPr>
+          <p:cNvPr id="26" name="连接符: 曲线 25">
+            <a:extLst>
+              <a:ext uri="{FF2B5EF4-FFF2-40B4-BE49-F238E27FC236}">
+                <a16:creationId xmlns:a16="http://schemas.microsoft.com/office/drawing/2014/main" id="{9DC672C9-00FC-0FB2-278D-1AEF94531B81}"/>
+              </a:ext>
+            </a:extLst>
+          </p:cNvPr>
+          <p:cNvCxnSpPr>
+            <a:cxnSpLocks/>
+            <a:stCxn id="5" idx="2"/>
+            <a:endCxn id="7" idx="0"/>
+          </p:cNvCxnSpPr>
+          <p:nvPr/>
+        </p:nvCxnSpPr>
+        <p:spPr>
+          <a:xfrm rot="16200000" flipH="1">
+            <a:off x="8571045" y="1965670"/>
+            <a:ext cx="782195" cy="1786410"/>
+          </a:xfrm>
+          <a:prstGeom prst="curvedConnector3">
+            <a:avLst>
+              <a:gd name="adj1" fmla="val 50000"/>
+            </a:avLst>
+          </a:prstGeom>
+          <a:ln>
+            <a:headEnd type="triangle"/>
+            <a:tailEnd type="triangle"/>
+          </a:ln>
+        </p:spPr>
+        <p:style>
+          <a:lnRef idx="1">
+            <a:schemeClr val="accent1"/>
+          </a:lnRef>
+          <a:fillRef idx="0">
+            <a:schemeClr val="accent1"/>
+          </a:fillRef>
+          <a:effectRef idx="0">
+            <a:schemeClr val="accent1"/>
+          </a:effectRef>
+          <a:fontRef idx="minor">
+            <a:schemeClr val="tx1"/>
+          </a:fontRef>
+        </p:style>
+      </p:cxnSp>
+      <p:cxnSp>
+        <p:nvCxnSpPr>
+          <p:cNvPr id="27" name="连接符: 曲线 26">
+            <a:extLst>
+              <a:ext uri="{FF2B5EF4-FFF2-40B4-BE49-F238E27FC236}">
+                <a16:creationId xmlns:a16="http://schemas.microsoft.com/office/drawing/2014/main" id="{6D4E261F-9BA9-6243-A291-2702BE6B7AF8}"/>
+              </a:ext>
+            </a:extLst>
+          </p:cNvPr>
+          <p:cNvCxnSpPr>
+            <a:cxnSpLocks/>
+            <a:stCxn id="5" idx="2"/>
+            <a:endCxn id="8" idx="0"/>
+          </p:cNvCxnSpPr>
+          <p:nvPr/>
+        </p:nvCxnSpPr>
+        <p:spPr>
+          <a:xfrm rot="16200000" flipH="1">
+            <a:off x="9216315" y="1320399"/>
+            <a:ext cx="782196" cy="3076953"/>
+          </a:xfrm>
+          <a:prstGeom prst="curvedConnector3">
+            <a:avLst>
+              <a:gd name="adj1" fmla="val 50000"/>
+            </a:avLst>
+          </a:prstGeom>
+          <a:ln>
+            <a:headEnd type="triangle"/>
+            <a:tailEnd type="triangle"/>
+          </a:ln>
+        </p:spPr>
+        <p:style>
+          <a:lnRef idx="1">
+            <a:schemeClr val="accent1"/>
+          </a:lnRef>
+          <a:fillRef idx="0">
+            <a:schemeClr val="accent1"/>
+          </a:fillRef>
+          <a:effectRef idx="0">
+            <a:schemeClr val="accent1"/>
+          </a:effectRef>
+          <a:fontRef idx="minor">
+            <a:schemeClr val="tx1"/>
+          </a:fontRef>
+        </p:style>
+      </p:cxnSp>
+      <p:sp>
+        <p:nvSpPr>
+          <p:cNvPr id="29" name="文本框 28">
+            <a:extLst>
+              <a:ext uri="{FF2B5EF4-FFF2-40B4-BE49-F238E27FC236}">
+                <a16:creationId xmlns:a16="http://schemas.microsoft.com/office/drawing/2014/main" id="{FFE0C3DA-F903-BD4B-88D3-22B4E3C873FE}"/>
+              </a:ext>
+            </a:extLst>
+          </p:cNvPr>
+          <p:cNvSpPr txBox="1"/>
+          <p:nvPr/>
+        </p:nvSpPr>
+        <p:spPr>
+          <a:xfrm>
+            <a:off x="6831486" y="2694516"/>
+            <a:ext cx="1145406" cy="369332"/>
+          </a:xfrm>
+          <a:prstGeom prst="rect">
+            <a:avLst/>
+          </a:prstGeom>
+          <a:noFill/>
+        </p:spPr>
+        <p:txBody>
+          <a:bodyPr wrap="square" rtlCol="0">
+            <a:spAutoFit/>
+          </a:bodyPr>
+          <a:lstStyle/>
+          <a:p>
+            <a:pPr algn="ctr"/>
+            <a:r>
+              <a:rPr lang="en-US" altLang="zh-CN" dirty="0"/>
+              <a:t>&lt;k1,fid&gt;</a:t>
+            </a:r>
+          </a:p>
+        </p:txBody>
+      </p:sp>
+      <p:sp>
+        <p:nvSpPr>
+          <p:cNvPr id="30" name="文本框 29">
+            <a:extLst>
+              <a:ext uri="{FF2B5EF4-FFF2-40B4-BE49-F238E27FC236}">
+                <a16:creationId xmlns:a16="http://schemas.microsoft.com/office/drawing/2014/main" id="{6FDEFFE1-77D3-DF87-80A8-89A3330F5969}"/>
+              </a:ext>
+            </a:extLst>
+          </p:cNvPr>
+          <p:cNvSpPr txBox="1"/>
+          <p:nvPr/>
+        </p:nvSpPr>
+        <p:spPr>
+          <a:xfrm>
+            <a:off x="9069676" y="2846811"/>
+            <a:ext cx="1145406" cy="369332"/>
+          </a:xfrm>
+          <a:prstGeom prst="rect">
+            <a:avLst/>
+          </a:prstGeom>
+          <a:noFill/>
+        </p:spPr>
+        <p:txBody>
+          <a:bodyPr wrap="square" rtlCol="0">
+            <a:spAutoFit/>
+          </a:bodyPr>
+          <a:lstStyle/>
+          <a:p>
+            <a:pPr algn="ctr"/>
+            <a:r>
+              <a:rPr lang="en-US" altLang="zh-CN" dirty="0"/>
+              <a:t>&lt;k2,fid&gt;</a:t>
+            </a:r>
+          </a:p>
+        </p:txBody>
+      </p:sp>
+      <p:sp>
+        <p:nvSpPr>
+          <p:cNvPr id="31" name="文本框 30">
+            <a:extLst>
+              <a:ext uri="{FF2B5EF4-FFF2-40B4-BE49-F238E27FC236}">
+                <a16:creationId xmlns:a16="http://schemas.microsoft.com/office/drawing/2014/main" id="{226F07AE-CE5D-12C6-54C6-3A75362A9408}"/>
+              </a:ext>
+            </a:extLst>
+          </p:cNvPr>
+          <p:cNvSpPr txBox="1"/>
+          <p:nvPr/>
+        </p:nvSpPr>
+        <p:spPr>
+          <a:xfrm>
+            <a:off x="10143006" y="2812981"/>
+            <a:ext cx="1145406" cy="369332"/>
+          </a:xfrm>
+          <a:prstGeom prst="rect">
+            <a:avLst/>
+          </a:prstGeom>
+          <a:noFill/>
+        </p:spPr>
+        <p:txBody>
+          <a:bodyPr wrap="square" rtlCol="0">
+            <a:spAutoFit/>
+          </a:bodyPr>
+          <a:lstStyle/>
+          <a:p>
+            <a:pPr algn="ctr"/>
+            <a:r>
+              <a:rPr lang="en-US" altLang="zh-CN" dirty="0"/>
+              <a:t>&lt;k3,fid&gt;</a:t>
+            </a:r>
+          </a:p>
+        </p:txBody>
+      </p:sp>
+      <p:graphicFrame>
+        <p:nvGraphicFramePr>
+          <p:cNvPr id="41" name="表格 40">
+            <a:extLst>
+              <a:ext uri="{FF2B5EF4-FFF2-40B4-BE49-F238E27FC236}">
+                <a16:creationId xmlns:a16="http://schemas.microsoft.com/office/drawing/2014/main" id="{B449AB07-2D4E-7D92-F7EE-E75C53897294}"/>
+              </a:ext>
+            </a:extLst>
+          </p:cNvPr>
+          <p:cNvGraphicFramePr>
+            <a:graphicFrameLocks noGrp="1"/>
+          </p:cNvGraphicFramePr>
+          <p:nvPr>
+            <p:extLst>
+              <p:ext uri="{D42A27DB-BD31-4B8C-83A1-F6EECF244321}">
+                <p14:modId xmlns:p14="http://schemas.microsoft.com/office/powerpoint/2010/main" val="896625515"/>
+              </p:ext>
+            </p:extLst>
+          </p:nvPr>
+        </p:nvGraphicFramePr>
+        <p:xfrm>
+          <a:off x="5054056" y="3922005"/>
+          <a:ext cx="3554860" cy="370840"/>
+        </p:xfrm>
+        <a:graphic>
+          <a:graphicData uri="http://schemas.openxmlformats.org/drawingml/2006/table">
+            <a:tbl>
+              <a:tblPr firstRow="1" bandRow="1">
+                <a:tableStyleId>{5C22544A-7EE6-4342-B048-85BDC9FD1C3A}</a:tableStyleId>
+              </a:tblPr>
+              <a:tblGrid>
+                <a:gridCol w="355486">
+                  <a:extLst>
+                    <a:ext uri="{9D8B030D-6E8A-4147-A177-3AD203B41FA5}">
+                      <a16:colId xmlns:a16="http://schemas.microsoft.com/office/drawing/2014/main" val="1850716159"/>
+                    </a:ext>
+                  </a:extLst>
+                </a:gridCol>
+                <a:gridCol w="355486">
+                  <a:extLst>
+                    <a:ext uri="{9D8B030D-6E8A-4147-A177-3AD203B41FA5}">
+                      <a16:colId xmlns:a16="http://schemas.microsoft.com/office/drawing/2014/main" val="3585250148"/>
+                    </a:ext>
+                  </a:extLst>
+                </a:gridCol>
+                <a:gridCol w="355486">
+                  <a:extLst>
+                    <a:ext uri="{9D8B030D-6E8A-4147-A177-3AD203B41FA5}">
+                      <a16:colId xmlns:a16="http://schemas.microsoft.com/office/drawing/2014/main" val="927467298"/>
+                    </a:ext>
+                  </a:extLst>
+                </a:gridCol>
+                <a:gridCol w="355486">
+                  <a:extLst>
+                    <a:ext uri="{9D8B030D-6E8A-4147-A177-3AD203B41FA5}">
+                      <a16:colId xmlns:a16="http://schemas.microsoft.com/office/drawing/2014/main" val="1014500944"/>
+                    </a:ext>
+                  </a:extLst>
+                </a:gridCol>
+                <a:gridCol w="355486">
+                  <a:extLst>
+                    <a:ext uri="{9D8B030D-6E8A-4147-A177-3AD203B41FA5}">
+                      <a16:colId xmlns:a16="http://schemas.microsoft.com/office/drawing/2014/main" val="2485687745"/>
+                    </a:ext>
+                  </a:extLst>
+                </a:gridCol>
+                <a:gridCol w="355486">
+                  <a:extLst>
+                    <a:ext uri="{9D8B030D-6E8A-4147-A177-3AD203B41FA5}">
+                      <a16:colId xmlns:a16="http://schemas.microsoft.com/office/drawing/2014/main" val="3520781647"/>
+                    </a:ext>
+                  </a:extLst>
+                </a:gridCol>
+                <a:gridCol w="355486">
+                  <a:extLst>
+                    <a:ext uri="{9D8B030D-6E8A-4147-A177-3AD203B41FA5}">
+                      <a16:colId xmlns:a16="http://schemas.microsoft.com/office/drawing/2014/main" val="651158751"/>
+                    </a:ext>
+                  </a:extLst>
+                </a:gridCol>
+                <a:gridCol w="355486">
+                  <a:extLst>
+                    <a:ext uri="{9D8B030D-6E8A-4147-A177-3AD203B41FA5}">
+                      <a16:colId xmlns:a16="http://schemas.microsoft.com/office/drawing/2014/main" val="307089865"/>
+                    </a:ext>
+                  </a:extLst>
+                </a:gridCol>
+                <a:gridCol w="355486">
+                  <a:extLst>
+                    <a:ext uri="{9D8B030D-6E8A-4147-A177-3AD203B41FA5}">
+                      <a16:colId xmlns:a16="http://schemas.microsoft.com/office/drawing/2014/main" val="4254016708"/>
+                    </a:ext>
+                  </a:extLst>
+                </a:gridCol>
+                <a:gridCol w="355486">
+                  <a:extLst>
+                    <a:ext uri="{9D8B030D-6E8A-4147-A177-3AD203B41FA5}">
+                      <a16:colId xmlns:a16="http://schemas.microsoft.com/office/drawing/2014/main" val="3990626030"/>
+                    </a:ext>
+                  </a:extLst>
+                </a:gridCol>
+              </a:tblGrid>
+              <a:tr h="370840">
+                <a:tc>
+                  <a:txBody>
+                    <a:bodyPr/>
+                    <a:lstStyle/>
+                    <a:p>
+                      <a:endParaRPr lang="zh-CN" altLang="en-US"/>
+                    </a:p>
+                  </a:txBody>
+                  <a:tcPr>
+                    <a:lnL w="12700" cap="flat" cmpd="sng" algn="ctr">
+                      <a:solidFill>
+                        <a:schemeClr val="tx1"/>
+                      </a:solidFill>
+                      <a:prstDash val="solid"/>
+                      <a:round/>
+                      <a:headEnd type="none" w="med" len="med"/>
+                      <a:tailEnd type="none" w="med" len="med"/>
+                    </a:lnL>
+                    <a:lnR w="12700" cap="flat" cmpd="sng" algn="ctr">
+                      <a:solidFill>
+                        <a:schemeClr val="tx1"/>
+                      </a:solidFill>
+                      <a:prstDash val="solid"/>
+                      <a:round/>
+                      <a:headEnd type="none" w="med" len="med"/>
+                      <a:tailEnd type="none" w="med" len="med"/>
+                    </a:lnR>
+                    <a:lnT w="12700" cap="flat" cmpd="sng" algn="ctr">
+                      <a:solidFill>
+                        <a:schemeClr val="tx1"/>
+                      </a:solidFill>
+                      <a:prstDash val="solid"/>
+                      <a:round/>
+                      <a:headEnd type="none" w="med" len="med"/>
+                      <a:tailEnd type="none" w="med" len="med"/>
+                    </a:lnT>
+                    <a:lnB w="12700" cap="flat" cmpd="sng" algn="ctr">
+                      <a:solidFill>
+                        <a:schemeClr val="tx1"/>
+                      </a:solidFill>
+                      <a:prstDash val="solid"/>
+                      <a:round/>
+                      <a:headEnd type="none" w="med" len="med"/>
+                      <a:tailEnd type="none" w="med" len="med"/>
+                    </a:lnB>
+                    <a:solidFill>
+                      <a:schemeClr val="bg1"/>
+                    </a:solidFill>
+                  </a:tcPr>
+                </a:tc>
+                <a:tc>
+                  <a:txBody>
+                    <a:bodyPr/>
+                    <a:lstStyle/>
+                    <a:p>
+                      <a:endParaRPr lang="zh-CN" altLang="en-US"/>
+                    </a:p>
+                  </a:txBody>
+                  <a:tcPr>
+                    <a:lnL w="12700" cap="flat" cmpd="sng" algn="ctr">
+                      <a:solidFill>
+                        <a:schemeClr val="tx1"/>
+                      </a:solidFill>
+                      <a:prstDash val="solid"/>
+                      <a:round/>
+                      <a:headEnd type="none" w="med" len="med"/>
+                      <a:tailEnd type="none" w="med" len="med"/>
+                    </a:lnL>
+                    <a:lnR w="12700" cap="flat" cmpd="sng" algn="ctr">
+                      <a:solidFill>
+                        <a:schemeClr val="tx1"/>
+                      </a:solidFill>
+                      <a:prstDash val="solid"/>
+                      <a:round/>
+                      <a:headEnd type="none" w="med" len="med"/>
+                      <a:tailEnd type="none" w="med" len="med"/>
+                    </a:lnR>
+                    <a:lnT w="12700" cap="flat" cmpd="sng" algn="ctr">
+                      <a:solidFill>
+                        <a:schemeClr val="tx1"/>
+                      </a:solidFill>
+                      <a:prstDash val="solid"/>
+                      <a:round/>
+                      <a:headEnd type="none" w="med" len="med"/>
+                      <a:tailEnd type="none" w="med" len="med"/>
+                    </a:lnT>
+                    <a:lnB w="12700" cap="flat" cmpd="sng" algn="ctr">
+                      <a:solidFill>
+                        <a:schemeClr val="tx1"/>
+                      </a:solidFill>
+                      <a:prstDash val="solid"/>
+                      <a:round/>
+                      <a:headEnd type="none" w="med" len="med"/>
+                      <a:tailEnd type="none" w="med" len="med"/>
+                    </a:lnB>
+                    <a:solidFill>
+                      <a:schemeClr val="bg1"/>
+                    </a:solidFill>
+                  </a:tcPr>
+                </a:tc>
+                <a:tc>
+                  <a:txBody>
+                    <a:bodyPr/>
+                    <a:lstStyle/>
+                    <a:p>
+                      <a:endParaRPr lang="zh-CN" altLang="en-US"/>
+                    </a:p>
+                  </a:txBody>
+                  <a:tcPr>
+                    <a:lnL w="12700" cap="flat" cmpd="sng" algn="ctr">
+                      <a:solidFill>
+                        <a:schemeClr val="tx1"/>
+                      </a:solidFill>
+                      <a:prstDash val="solid"/>
+                      <a:round/>
+                      <a:headEnd type="none" w="med" len="med"/>
+                      <a:tailEnd type="none" w="med" len="med"/>
+                    </a:lnL>
+                    <a:lnR w="12700" cap="flat" cmpd="sng" algn="ctr">
+                      <a:solidFill>
+                        <a:schemeClr val="tx1"/>
+                      </a:solidFill>
+                      <a:prstDash val="solid"/>
+                      <a:round/>
+                      <a:headEnd type="none" w="med" len="med"/>
+                      <a:tailEnd type="none" w="med" len="med"/>
+                    </a:lnR>
+                    <a:lnT w="12700" cap="flat" cmpd="sng" algn="ctr">
+                      <a:solidFill>
+                        <a:schemeClr val="tx1"/>
+                      </a:solidFill>
+                      <a:prstDash val="solid"/>
+                      <a:round/>
+                      <a:headEnd type="none" w="med" len="med"/>
+                      <a:tailEnd type="none" w="med" len="med"/>
+                    </a:lnT>
+                    <a:lnB w="12700" cap="flat" cmpd="sng" algn="ctr">
+                      <a:solidFill>
+                        <a:schemeClr val="tx1"/>
+                      </a:solidFill>
+                      <a:prstDash val="solid"/>
+                      <a:round/>
+                      <a:headEnd type="none" w="med" len="med"/>
+                      <a:tailEnd type="none" w="med" len="med"/>
+                    </a:lnB>
+                    <a:solidFill>
+                      <a:schemeClr val="bg1"/>
+                    </a:solidFill>
+                  </a:tcPr>
+                </a:tc>
+                <a:tc>
+                  <a:txBody>
+                    <a:bodyPr/>
+                    <a:lstStyle/>
+                    <a:p>
+                      <a:endParaRPr lang="zh-CN" altLang="en-US"/>
+                    </a:p>
+                  </a:txBody>
+                  <a:tcPr>
+                    <a:lnL w="12700" cap="flat" cmpd="sng" algn="ctr">
+                      <a:solidFill>
+                        <a:schemeClr val="tx1"/>
+                      </a:solidFill>
+                      <a:prstDash val="solid"/>
+                      <a:round/>
+                      <a:headEnd type="none" w="med" len="med"/>
+                      <a:tailEnd type="none" w="med" len="med"/>
+                    </a:lnL>
+                    <a:lnR w="12700" cap="flat" cmpd="sng" algn="ctr">
+                      <a:solidFill>
+                        <a:schemeClr val="tx1"/>
+                      </a:solidFill>
+                      <a:prstDash val="solid"/>
+                      <a:round/>
+                      <a:headEnd type="none" w="med" len="med"/>
+                      <a:tailEnd type="none" w="med" len="med"/>
+                    </a:lnR>
+                    <a:lnT w="12700" cap="flat" cmpd="sng" algn="ctr">
+                      <a:solidFill>
+                        <a:schemeClr val="tx1"/>
+                      </a:solidFill>
+                      <a:prstDash val="solid"/>
+                      <a:round/>
+                      <a:headEnd type="none" w="med" len="med"/>
+                      <a:tailEnd type="none" w="med" len="med"/>
+                    </a:lnT>
+                    <a:lnB w="12700" cap="flat" cmpd="sng" algn="ctr">
+                      <a:solidFill>
+                        <a:schemeClr val="tx1"/>
+                      </a:solidFill>
+                      <a:prstDash val="solid"/>
+                      <a:round/>
+                      <a:headEnd type="none" w="med" len="med"/>
+                      <a:tailEnd type="none" w="med" len="med"/>
+                    </a:lnB>
+                    <a:solidFill>
+                      <a:schemeClr val="bg1"/>
+                    </a:solidFill>
+                  </a:tcPr>
+                </a:tc>
+                <a:tc>
+                  <a:txBody>
+                    <a:bodyPr/>
+                    <a:lstStyle/>
+                    <a:p>
+                      <a:endParaRPr lang="zh-CN" altLang="en-US"/>
+                    </a:p>
+                  </a:txBody>
+                  <a:tcPr>
+                    <a:lnL w="12700" cap="flat" cmpd="sng" algn="ctr">
+                      <a:solidFill>
+                        <a:schemeClr val="tx1"/>
+                      </a:solidFill>
+                      <a:prstDash val="solid"/>
+                      <a:round/>
+                      <a:headEnd type="none" w="med" len="med"/>
+                      <a:tailEnd type="none" w="med" len="med"/>
+                    </a:lnL>
+                    <a:lnR w="12700" cap="flat" cmpd="sng" algn="ctr">
+                      <a:solidFill>
+                        <a:schemeClr val="tx1"/>
+                      </a:solidFill>
+                      <a:prstDash val="solid"/>
+                      <a:round/>
+                      <a:headEnd type="none" w="med" len="med"/>
+                      <a:tailEnd type="none" w="med" len="med"/>
+                    </a:lnR>
+                    <a:lnT w="12700" cap="flat" cmpd="sng" algn="ctr">
+                      <a:solidFill>
+                        <a:schemeClr val="tx1"/>
+                      </a:solidFill>
+                      <a:prstDash val="solid"/>
+                      <a:round/>
+                      <a:headEnd type="none" w="med" len="med"/>
+                      <a:tailEnd type="none" w="med" len="med"/>
+                    </a:lnT>
+                    <a:lnB w="12700" cap="flat" cmpd="sng" algn="ctr">
+                      <a:solidFill>
+                        <a:schemeClr val="tx1"/>
+                      </a:solidFill>
+                      <a:prstDash val="solid"/>
+                      <a:round/>
+                      <a:headEnd type="none" w="med" len="med"/>
+                      <a:tailEnd type="none" w="med" len="med"/>
+                    </a:lnB>
+                    <a:solidFill>
+                      <a:schemeClr val="bg1"/>
+                    </a:solidFill>
+                  </a:tcPr>
+                </a:tc>
+                <a:tc>
+                  <a:txBody>
+                    <a:bodyPr/>
+                    <a:lstStyle/>
+                    <a:p>
+                      <a:endParaRPr lang="zh-CN" altLang="en-US" dirty="0"/>
+                    </a:p>
+                  </a:txBody>
+                  <a:tcPr>
+                    <a:lnL w="12700" cap="flat" cmpd="sng" algn="ctr">
+                      <a:solidFill>
+                        <a:schemeClr val="tx1"/>
+                      </a:solidFill>
+                      <a:prstDash val="solid"/>
+                      <a:round/>
+                      <a:headEnd type="none" w="med" len="med"/>
+                      <a:tailEnd type="none" w="med" len="med"/>
+                    </a:lnL>
+                    <a:lnR w="12700" cap="flat" cmpd="sng" algn="ctr">
+                      <a:solidFill>
+                        <a:schemeClr val="tx1"/>
+                      </a:solidFill>
+                      <a:prstDash val="solid"/>
+                      <a:round/>
+                      <a:headEnd type="none" w="med" len="med"/>
+                      <a:tailEnd type="none" w="med" len="med"/>
+                    </a:lnR>
+                    <a:lnT w="12700" cap="flat" cmpd="sng" algn="ctr">
+                      <a:solidFill>
+                        <a:schemeClr val="tx1"/>
+                      </a:solidFill>
+                      <a:prstDash val="solid"/>
+                      <a:round/>
+                      <a:headEnd type="none" w="med" len="med"/>
+                      <a:tailEnd type="none" w="med" len="med"/>
+                    </a:lnT>
+                    <a:lnB w="12700" cap="flat" cmpd="sng" algn="ctr">
+                      <a:solidFill>
+                        <a:schemeClr val="tx1"/>
+                      </a:solidFill>
+                      <a:prstDash val="solid"/>
+                      <a:round/>
+                      <a:headEnd type="none" w="med" len="med"/>
+                      <a:tailEnd type="none" w="med" len="med"/>
+                    </a:lnB>
+                    <a:solidFill>
+                      <a:schemeClr val="bg1"/>
+                    </a:solidFill>
+                  </a:tcPr>
+                </a:tc>
+                <a:tc>
+                  <a:txBody>
+                    <a:bodyPr/>
+                    <a:lstStyle/>
+                    <a:p>
+                      <a:endParaRPr lang="zh-CN" altLang="en-US" dirty="0"/>
+                    </a:p>
+                  </a:txBody>
+                  <a:tcPr>
+                    <a:lnL w="12700" cap="flat" cmpd="sng" algn="ctr">
+                      <a:solidFill>
+                        <a:schemeClr val="tx1"/>
+                      </a:solidFill>
+                      <a:prstDash val="solid"/>
+                      <a:round/>
+                      <a:headEnd type="none" w="med" len="med"/>
+                      <a:tailEnd type="none" w="med" len="med"/>
+                    </a:lnL>
+                    <a:lnR w="12700" cap="flat" cmpd="sng" algn="ctr">
+                      <a:solidFill>
+                        <a:schemeClr val="tx1"/>
+                      </a:solidFill>
+                      <a:prstDash val="solid"/>
+                      <a:round/>
+                      <a:headEnd type="none" w="med" len="med"/>
+                      <a:tailEnd type="none" w="med" len="med"/>
+                    </a:lnR>
+                    <a:lnT w="12700" cap="flat" cmpd="sng" algn="ctr">
+                      <a:solidFill>
+                        <a:schemeClr val="tx1"/>
+                      </a:solidFill>
+                      <a:prstDash val="solid"/>
+                      <a:round/>
+                      <a:headEnd type="none" w="med" len="med"/>
+                      <a:tailEnd type="none" w="med" len="med"/>
+                    </a:lnT>
+                    <a:lnB w="12700" cap="flat" cmpd="sng" algn="ctr">
+                      <a:solidFill>
+                        <a:schemeClr val="tx1"/>
+                      </a:solidFill>
+                      <a:prstDash val="solid"/>
+                      <a:round/>
+                      <a:headEnd type="none" w="med" len="med"/>
+                      <a:tailEnd type="none" w="med" len="med"/>
+                    </a:lnB>
+                    <a:solidFill>
+                      <a:schemeClr val="bg1"/>
+                    </a:solidFill>
+                  </a:tcPr>
+                </a:tc>
+                <a:tc>
+                  <a:txBody>
+                    <a:bodyPr/>
+                    <a:lstStyle/>
+                    <a:p>
+                      <a:endParaRPr lang="zh-CN" altLang="en-US" dirty="0"/>
+                    </a:p>
+                  </a:txBody>
+                  <a:tcPr>
+                    <a:lnL w="12700" cap="flat" cmpd="sng" algn="ctr">
+                      <a:solidFill>
+                        <a:schemeClr val="tx1"/>
+                      </a:solidFill>
+                      <a:prstDash val="solid"/>
+                      <a:round/>
+                      <a:headEnd type="none" w="med" len="med"/>
+                      <a:tailEnd type="none" w="med" len="med"/>
+                    </a:lnL>
+                    <a:lnR w="12700" cap="flat" cmpd="sng" algn="ctr">
+                      <a:solidFill>
+                        <a:schemeClr val="tx1"/>
+                      </a:solidFill>
+                      <a:prstDash val="solid"/>
+                      <a:round/>
+                      <a:headEnd type="none" w="med" len="med"/>
+                      <a:tailEnd type="none" w="med" len="med"/>
+                    </a:lnR>
+                    <a:lnT w="12700" cap="flat" cmpd="sng" algn="ctr">
+                      <a:solidFill>
+                        <a:schemeClr val="tx1"/>
+                      </a:solidFill>
+                      <a:prstDash val="solid"/>
+                      <a:round/>
+                      <a:headEnd type="none" w="med" len="med"/>
+                      <a:tailEnd type="none" w="med" len="med"/>
+                    </a:lnT>
+                    <a:lnB w="12700" cap="flat" cmpd="sng" algn="ctr">
+                      <a:solidFill>
+                        <a:schemeClr val="tx1"/>
+                      </a:solidFill>
+                      <a:prstDash val="solid"/>
+                      <a:round/>
+                      <a:headEnd type="none" w="med" len="med"/>
+                      <a:tailEnd type="none" w="med" len="med"/>
+                    </a:lnB>
+                    <a:solidFill>
+                      <a:schemeClr val="bg1"/>
+                    </a:solidFill>
+                  </a:tcPr>
+                </a:tc>
+                <a:tc>
+                  <a:txBody>
+                    <a:bodyPr/>
+                    <a:lstStyle/>
+                    <a:p>
+                      <a:endParaRPr lang="zh-CN" altLang="en-US" dirty="0"/>
+                    </a:p>
+                  </a:txBody>
+                  <a:tcPr>
+                    <a:lnL w="12700" cap="flat" cmpd="sng" algn="ctr">
+                      <a:solidFill>
+                        <a:schemeClr val="tx1"/>
+                      </a:solidFill>
+                      <a:prstDash val="solid"/>
+                      <a:round/>
+                      <a:headEnd type="none" w="med" len="med"/>
+                      <a:tailEnd type="none" w="med" len="med"/>
+                    </a:lnL>
+                    <a:lnR w="12700" cap="flat" cmpd="sng" algn="ctr">
+                      <a:solidFill>
+                        <a:schemeClr val="tx1"/>
+                      </a:solidFill>
+                      <a:prstDash val="solid"/>
+                      <a:round/>
+                      <a:headEnd type="none" w="med" len="med"/>
+                      <a:tailEnd type="none" w="med" len="med"/>
+                    </a:lnR>
+                    <a:lnT w="12700" cap="flat" cmpd="sng" algn="ctr">
+                      <a:solidFill>
+                        <a:schemeClr val="tx1"/>
+                      </a:solidFill>
+                      <a:prstDash val="solid"/>
+                      <a:round/>
+                      <a:headEnd type="none" w="med" len="med"/>
+                      <a:tailEnd type="none" w="med" len="med"/>
+                    </a:lnT>
+                    <a:lnB w="12700" cap="flat" cmpd="sng" algn="ctr">
+                      <a:solidFill>
+                        <a:schemeClr val="tx1"/>
+                      </a:solidFill>
+                      <a:prstDash val="solid"/>
+                      <a:round/>
+                      <a:headEnd type="none" w="med" len="med"/>
+                      <a:tailEnd type="none" w="med" len="med"/>
+                    </a:lnB>
+                    <a:solidFill>
+                      <a:schemeClr val="bg1"/>
+                    </a:solidFill>
+                  </a:tcPr>
+                </a:tc>
+                <a:tc>
+                  <a:txBody>
+                    <a:bodyPr/>
+                    <a:lstStyle/>
+                    <a:p>
+                      <a:endParaRPr lang="zh-CN" altLang="en-US" dirty="0"/>
+                    </a:p>
+                  </a:txBody>
+                  <a:tcPr>
+                    <a:lnL w="12700" cap="flat" cmpd="sng" algn="ctr">
+                      <a:solidFill>
+                        <a:schemeClr val="tx1"/>
+                      </a:solidFill>
+                      <a:prstDash val="solid"/>
+                      <a:round/>
+                      <a:headEnd type="none" w="med" len="med"/>
+                      <a:tailEnd type="none" w="med" len="med"/>
+                    </a:lnL>
+                    <a:lnR w="12700" cap="flat" cmpd="sng" algn="ctr">
+                      <a:solidFill>
+                        <a:schemeClr val="tx1"/>
+                      </a:solidFill>
+                      <a:prstDash val="solid"/>
+                      <a:round/>
+                      <a:headEnd type="none" w="med" len="med"/>
+                      <a:tailEnd type="none" w="med" len="med"/>
+                    </a:lnR>
+                    <a:lnT w="12700" cap="flat" cmpd="sng" algn="ctr">
+                      <a:solidFill>
+                        <a:schemeClr val="tx1"/>
+                      </a:solidFill>
+                      <a:prstDash val="solid"/>
+                      <a:round/>
+                      <a:headEnd type="none" w="med" len="med"/>
+                      <a:tailEnd type="none" w="med" len="med"/>
+                    </a:lnT>
+                    <a:lnB w="12700" cap="flat" cmpd="sng" algn="ctr">
+                      <a:solidFill>
+                        <a:schemeClr val="tx1"/>
+                      </a:solidFill>
+                      <a:prstDash val="solid"/>
+                      <a:round/>
+                      <a:headEnd type="none" w="med" len="med"/>
+                      <a:tailEnd type="none" w="med" len="med"/>
+                    </a:lnB>
+                    <a:solidFill>
+                      <a:schemeClr val="bg1"/>
+                    </a:solidFill>
+                  </a:tcPr>
+                </a:tc>
+                <a:extLst>
+                  <a:ext uri="{0D108BD9-81ED-4DB2-BD59-A6C34878D82A}">
+                    <a16:rowId xmlns:a16="http://schemas.microsoft.com/office/drawing/2014/main" val="235037346"/>
+                  </a:ext>
+                </a:extLst>
+              </a:tr>
+            </a:tbl>
+          </a:graphicData>
+        </a:graphic>
+      </p:graphicFrame>
+      <p:sp>
+        <p:nvSpPr>
+          <p:cNvPr id="42" name="椭圆 41">
+            <a:extLst>
+              <a:ext uri="{FF2B5EF4-FFF2-40B4-BE49-F238E27FC236}">
+                <a16:creationId xmlns:a16="http://schemas.microsoft.com/office/drawing/2014/main" id="{57757148-8C64-71D6-2830-68C073C387BD}"/>
+              </a:ext>
+            </a:extLst>
+          </p:cNvPr>
+          <p:cNvSpPr/>
+          <p:nvPr/>
+        </p:nvSpPr>
+        <p:spPr>
+          <a:xfrm>
+            <a:off x="5726051" y="4554932"/>
+            <a:ext cx="308225" cy="308225"/>
+          </a:xfrm>
+          <a:prstGeom prst="ellipse">
+            <a:avLst/>
+          </a:prstGeom>
+        </p:spPr>
+        <p:style>
+          <a:lnRef idx="2">
+            <a:schemeClr val="accent1">
+              <a:shade val="15000"/>
+            </a:schemeClr>
+          </a:lnRef>
+          <a:fillRef idx="1">
+            <a:schemeClr val="accent1"/>
+          </a:fillRef>
+          <a:effectRef idx="0">
+            <a:schemeClr val="accent1"/>
+          </a:effectRef>
+          <a:fontRef idx="minor">
+            <a:schemeClr val="lt1"/>
+          </a:fontRef>
+        </p:style>
+        <p:txBody>
+          <a:bodyPr rtlCol="0" anchor="ctr"/>
+          <a:lstStyle/>
+          <a:p>
+            <a:pPr algn="ctr"/>
+            <a:endParaRPr lang="zh-CN" altLang="en-US"/>
+          </a:p>
+        </p:txBody>
+      </p:sp>
+      <p:sp>
+        <p:nvSpPr>
+          <p:cNvPr id="43" name="椭圆 42">
+            <a:extLst>
+              <a:ext uri="{FF2B5EF4-FFF2-40B4-BE49-F238E27FC236}">
+                <a16:creationId xmlns:a16="http://schemas.microsoft.com/office/drawing/2014/main" id="{78BEE516-F9A8-A4A2-917E-20CE561956F9}"/>
+              </a:ext>
+            </a:extLst>
+          </p:cNvPr>
+          <p:cNvSpPr/>
+          <p:nvPr/>
+        </p:nvSpPr>
+        <p:spPr>
+          <a:xfrm>
+            <a:off x="5251728" y="5075041"/>
+            <a:ext cx="308225" cy="308225"/>
+          </a:xfrm>
+          <a:prstGeom prst="ellipse">
+            <a:avLst/>
+          </a:prstGeom>
+        </p:spPr>
+        <p:style>
+          <a:lnRef idx="2">
+            <a:schemeClr val="accent1">
+              <a:shade val="15000"/>
+            </a:schemeClr>
+          </a:lnRef>
+          <a:fillRef idx="1">
+            <a:schemeClr val="accent1"/>
+          </a:fillRef>
+          <a:effectRef idx="0">
+            <a:schemeClr val="accent1"/>
+          </a:effectRef>
+          <a:fontRef idx="minor">
+            <a:schemeClr val="lt1"/>
+          </a:fontRef>
+        </p:style>
+        <p:txBody>
+          <a:bodyPr rtlCol="0" anchor="ctr"/>
+          <a:lstStyle/>
+          <a:p>
+            <a:pPr algn="ctr"/>
+            <a:endParaRPr lang="zh-CN" altLang="en-US"/>
+          </a:p>
+        </p:txBody>
+      </p:sp>
+      <p:sp>
+        <p:nvSpPr>
+          <p:cNvPr id="44" name="椭圆 43">
+            <a:extLst>
+              <a:ext uri="{FF2B5EF4-FFF2-40B4-BE49-F238E27FC236}">
+                <a16:creationId xmlns:a16="http://schemas.microsoft.com/office/drawing/2014/main" id="{1ECF28DB-E6D9-C9E5-4050-891A1A06E6BD}"/>
+              </a:ext>
+            </a:extLst>
+          </p:cNvPr>
+          <p:cNvSpPr/>
+          <p:nvPr/>
+        </p:nvSpPr>
+        <p:spPr>
+          <a:xfrm>
+            <a:off x="6198581" y="5075040"/>
+            <a:ext cx="308225" cy="308225"/>
+          </a:xfrm>
+          <a:prstGeom prst="ellipse">
+            <a:avLst/>
+          </a:prstGeom>
+        </p:spPr>
+        <p:style>
+          <a:lnRef idx="2">
+            <a:schemeClr val="accent1">
+              <a:shade val="15000"/>
+            </a:schemeClr>
+          </a:lnRef>
+          <a:fillRef idx="1">
+            <a:schemeClr val="accent1"/>
+          </a:fillRef>
+          <a:effectRef idx="0">
+            <a:schemeClr val="accent1"/>
+          </a:effectRef>
+          <a:fontRef idx="minor">
+            <a:schemeClr val="lt1"/>
+          </a:fontRef>
+        </p:style>
+        <p:txBody>
+          <a:bodyPr rtlCol="0" anchor="ctr"/>
+          <a:lstStyle/>
+          <a:p>
+            <a:pPr algn="ctr"/>
+            <a:endParaRPr lang="zh-CN" altLang="en-US"/>
+          </a:p>
+        </p:txBody>
+      </p:sp>
+      <p:sp>
+        <p:nvSpPr>
+          <p:cNvPr id="45" name="椭圆 44">
+            <a:extLst>
+              <a:ext uri="{FF2B5EF4-FFF2-40B4-BE49-F238E27FC236}">
+                <a16:creationId xmlns:a16="http://schemas.microsoft.com/office/drawing/2014/main" id="{D83CDB74-A8D2-4120-D35B-F13D57AB65B2}"/>
+              </a:ext>
+            </a:extLst>
+          </p:cNvPr>
+          <p:cNvSpPr/>
+          <p:nvPr/>
+        </p:nvSpPr>
+        <p:spPr>
+          <a:xfrm>
+            <a:off x="5035969" y="5703925"/>
+            <a:ext cx="308225" cy="308225"/>
+          </a:xfrm>
+          <a:prstGeom prst="ellipse">
+            <a:avLst/>
+          </a:prstGeom>
+        </p:spPr>
+        <p:style>
+          <a:lnRef idx="2">
+            <a:schemeClr val="accent1">
+              <a:shade val="15000"/>
+            </a:schemeClr>
+          </a:lnRef>
+          <a:fillRef idx="1">
+            <a:schemeClr val="accent1"/>
+          </a:fillRef>
+          <a:effectRef idx="0">
+            <a:schemeClr val="accent1"/>
+          </a:effectRef>
+          <a:fontRef idx="minor">
+            <a:schemeClr val="lt1"/>
+          </a:fontRef>
+        </p:style>
+        <p:txBody>
+          <a:bodyPr rtlCol="0" anchor="ctr"/>
+          <a:lstStyle/>
+          <a:p>
+            <a:pPr algn="ctr"/>
+            <a:endParaRPr lang="zh-CN" altLang="en-US"/>
+          </a:p>
+        </p:txBody>
+      </p:sp>
+      <p:sp>
+        <p:nvSpPr>
+          <p:cNvPr id="46" name="椭圆 45">
+            <a:extLst>
+              <a:ext uri="{FF2B5EF4-FFF2-40B4-BE49-F238E27FC236}">
+                <a16:creationId xmlns:a16="http://schemas.microsoft.com/office/drawing/2014/main" id="{2C405B27-2314-6AB9-50E7-FB21088AC27F}"/>
+              </a:ext>
+            </a:extLst>
+          </p:cNvPr>
+          <p:cNvSpPr/>
+          <p:nvPr/>
+        </p:nvSpPr>
+        <p:spPr>
+          <a:xfrm>
+            <a:off x="5470832" y="5703924"/>
+            <a:ext cx="308225" cy="308225"/>
+          </a:xfrm>
+          <a:prstGeom prst="ellipse">
+            <a:avLst/>
+          </a:prstGeom>
+        </p:spPr>
+        <p:style>
+          <a:lnRef idx="2">
+            <a:schemeClr val="accent1">
+              <a:shade val="15000"/>
+            </a:schemeClr>
+          </a:lnRef>
+          <a:fillRef idx="1">
+            <a:schemeClr val="accent1"/>
+          </a:fillRef>
+          <a:effectRef idx="0">
+            <a:schemeClr val="accent1"/>
+          </a:effectRef>
+          <a:fontRef idx="minor">
+            <a:schemeClr val="lt1"/>
+          </a:fontRef>
+        </p:style>
+        <p:txBody>
+          <a:bodyPr rtlCol="0" anchor="ctr"/>
+          <a:lstStyle/>
+          <a:p>
+            <a:pPr algn="ctr"/>
+            <a:endParaRPr lang="zh-CN" altLang="en-US"/>
+          </a:p>
+        </p:txBody>
+      </p:sp>
+      <p:sp>
+        <p:nvSpPr>
+          <p:cNvPr id="47" name="椭圆 46">
+            <a:extLst>
+              <a:ext uri="{FF2B5EF4-FFF2-40B4-BE49-F238E27FC236}">
+                <a16:creationId xmlns:a16="http://schemas.microsoft.com/office/drawing/2014/main" id="{85B91881-A543-83D8-30E9-D23A9182F065}"/>
+              </a:ext>
+            </a:extLst>
+          </p:cNvPr>
+          <p:cNvSpPr/>
+          <p:nvPr/>
+        </p:nvSpPr>
+        <p:spPr>
+          <a:xfrm>
+            <a:off x="5982824" y="5703924"/>
+            <a:ext cx="308225" cy="308225"/>
+          </a:xfrm>
+          <a:prstGeom prst="ellipse">
+            <a:avLst/>
+          </a:prstGeom>
+        </p:spPr>
+        <p:style>
+          <a:lnRef idx="2">
+            <a:schemeClr val="accent1">
+              <a:shade val="15000"/>
+            </a:schemeClr>
+          </a:lnRef>
+          <a:fillRef idx="1">
+            <a:schemeClr val="accent1"/>
+          </a:fillRef>
+          <a:effectRef idx="0">
+            <a:schemeClr val="accent1"/>
+          </a:effectRef>
+          <a:fontRef idx="minor">
+            <a:schemeClr val="lt1"/>
+          </a:fontRef>
+        </p:style>
+        <p:txBody>
+          <a:bodyPr rtlCol="0" anchor="ctr"/>
+          <a:lstStyle/>
+          <a:p>
+            <a:pPr algn="ctr"/>
+            <a:endParaRPr lang="zh-CN" altLang="en-US"/>
+          </a:p>
+        </p:txBody>
+      </p:sp>
+      <p:sp>
+        <p:nvSpPr>
+          <p:cNvPr id="48" name="椭圆 47">
+            <a:extLst>
+              <a:ext uri="{FF2B5EF4-FFF2-40B4-BE49-F238E27FC236}">
+                <a16:creationId xmlns:a16="http://schemas.microsoft.com/office/drawing/2014/main" id="{D1561CD7-AE0B-2AA3-6682-33EB4F72867C}"/>
+              </a:ext>
+            </a:extLst>
+          </p:cNvPr>
+          <p:cNvSpPr/>
+          <p:nvPr/>
+        </p:nvSpPr>
+        <p:spPr>
+          <a:xfrm>
+            <a:off x="6412945" y="5703924"/>
+            <a:ext cx="308225" cy="308225"/>
+          </a:xfrm>
+          <a:prstGeom prst="ellipse">
+            <a:avLst/>
+          </a:prstGeom>
+        </p:spPr>
+        <p:style>
+          <a:lnRef idx="2">
+            <a:schemeClr val="accent1">
+              <a:shade val="15000"/>
+            </a:schemeClr>
+          </a:lnRef>
+          <a:fillRef idx="1">
+            <a:schemeClr val="accent1"/>
+          </a:fillRef>
+          <a:effectRef idx="0">
+            <a:schemeClr val="accent1"/>
+          </a:effectRef>
+          <a:fontRef idx="minor">
+            <a:schemeClr val="lt1"/>
+          </a:fontRef>
+        </p:style>
+        <p:txBody>
+          <a:bodyPr rtlCol="0" anchor="ctr"/>
+          <a:lstStyle/>
+          <a:p>
+            <a:pPr algn="ctr"/>
+            <a:endParaRPr lang="zh-CN" altLang="en-US"/>
+          </a:p>
+        </p:txBody>
+      </p:sp>
+      <p:cxnSp>
+        <p:nvCxnSpPr>
+          <p:cNvPr id="50" name="直接箭头连接符 49">
+            <a:extLst>
+              <a:ext uri="{FF2B5EF4-FFF2-40B4-BE49-F238E27FC236}">
+                <a16:creationId xmlns:a16="http://schemas.microsoft.com/office/drawing/2014/main" id="{C9987890-CEC0-389E-9172-8CF5A6D8A1F2}"/>
+              </a:ext>
+            </a:extLst>
+          </p:cNvPr>
+          <p:cNvCxnSpPr>
+            <a:cxnSpLocks/>
+            <a:stCxn id="42" idx="3"/>
+            <a:endCxn id="43" idx="7"/>
+          </p:cNvCxnSpPr>
+          <p:nvPr/>
+        </p:nvCxnSpPr>
+        <p:spPr>
+          <a:xfrm flipH="1">
+            <a:off x="5514814" y="4818018"/>
+            <a:ext cx="256376" cy="302162"/>
+          </a:xfrm>
+          <a:prstGeom prst="straightConnector1">
+            <a:avLst/>
+          </a:prstGeom>
+          <a:ln>
+            <a:tailEnd type="triangle"/>
+          </a:ln>
+        </p:spPr>
+        <p:style>
+          <a:lnRef idx="1">
+            <a:schemeClr val="accent1"/>
+          </a:lnRef>
+          <a:fillRef idx="0">
+            <a:schemeClr val="accent1"/>
+          </a:fillRef>
+          <a:effectRef idx="0">
+            <a:schemeClr val="accent1"/>
+          </a:effectRef>
+          <a:fontRef idx="minor">
+            <a:schemeClr val="tx1"/>
+          </a:fontRef>
+        </p:style>
+      </p:cxnSp>
+      <p:cxnSp>
+        <p:nvCxnSpPr>
+          <p:cNvPr id="51" name="直接箭头连接符 50">
+            <a:extLst>
+              <a:ext uri="{FF2B5EF4-FFF2-40B4-BE49-F238E27FC236}">
+                <a16:creationId xmlns:a16="http://schemas.microsoft.com/office/drawing/2014/main" id="{796B712B-DFCB-769E-EF26-B5621CBC835D}"/>
+              </a:ext>
+            </a:extLst>
+          </p:cNvPr>
+          <p:cNvCxnSpPr>
+            <a:cxnSpLocks/>
+            <a:stCxn id="42" idx="5"/>
+            <a:endCxn id="44" idx="1"/>
+          </p:cNvCxnSpPr>
+          <p:nvPr/>
+        </p:nvCxnSpPr>
+        <p:spPr>
+          <a:xfrm>
+            <a:off x="5989137" y="4818018"/>
+            <a:ext cx="254583" cy="302161"/>
+          </a:xfrm>
+          <a:prstGeom prst="straightConnector1">
+            <a:avLst/>
+          </a:prstGeom>
+          <a:ln>
+            <a:tailEnd type="triangle"/>
+          </a:ln>
+        </p:spPr>
+        <p:style>
+          <a:lnRef idx="1">
+            <a:schemeClr val="accent1"/>
+          </a:lnRef>
+          <a:fillRef idx="0">
+            <a:schemeClr val="accent1"/>
+          </a:fillRef>
+          <a:effectRef idx="0">
+            <a:schemeClr val="accent1"/>
+          </a:effectRef>
+          <a:fontRef idx="minor">
+            <a:schemeClr val="tx1"/>
+          </a:fontRef>
+        </p:style>
+      </p:cxnSp>
+      <p:cxnSp>
+        <p:nvCxnSpPr>
+          <p:cNvPr id="57" name="直接箭头连接符 56">
+            <a:extLst>
+              <a:ext uri="{FF2B5EF4-FFF2-40B4-BE49-F238E27FC236}">
+                <a16:creationId xmlns:a16="http://schemas.microsoft.com/office/drawing/2014/main" id="{9EEF40EC-5DDA-60F6-5F91-B7E818EE5896}"/>
+              </a:ext>
+            </a:extLst>
+          </p:cNvPr>
+          <p:cNvCxnSpPr>
+            <a:cxnSpLocks/>
+            <a:stCxn id="43" idx="3"/>
+            <a:endCxn id="45" idx="0"/>
+          </p:cNvCxnSpPr>
+          <p:nvPr/>
+        </p:nvCxnSpPr>
+        <p:spPr>
+          <a:xfrm flipH="1">
+            <a:off x="5190082" y="5338127"/>
+            <a:ext cx="106785" cy="365798"/>
+          </a:xfrm>
+          <a:prstGeom prst="straightConnector1">
+            <a:avLst/>
+          </a:prstGeom>
+          <a:ln>
+            <a:tailEnd type="triangle"/>
+          </a:ln>
+        </p:spPr>
+        <p:style>
+          <a:lnRef idx="1">
+            <a:schemeClr val="accent1"/>
+          </a:lnRef>
+          <a:fillRef idx="0">
+            <a:schemeClr val="accent1"/>
+          </a:fillRef>
+          <a:effectRef idx="0">
+            <a:schemeClr val="accent1"/>
+          </a:effectRef>
+          <a:fontRef idx="minor">
+            <a:schemeClr val="tx1"/>
+          </a:fontRef>
+        </p:style>
+      </p:cxnSp>
+      <p:cxnSp>
+        <p:nvCxnSpPr>
+          <p:cNvPr id="61" name="直接箭头连接符 60">
+            <a:extLst>
+              <a:ext uri="{FF2B5EF4-FFF2-40B4-BE49-F238E27FC236}">
+                <a16:creationId xmlns:a16="http://schemas.microsoft.com/office/drawing/2014/main" id="{F03C594A-BFD1-4281-D318-61D8AAEF1320}"/>
+              </a:ext>
+            </a:extLst>
+          </p:cNvPr>
+          <p:cNvCxnSpPr>
+            <a:cxnSpLocks/>
+            <a:stCxn id="43" idx="5"/>
+            <a:endCxn id="46" idx="0"/>
+          </p:cNvCxnSpPr>
+          <p:nvPr/>
+        </p:nvCxnSpPr>
+        <p:spPr>
+          <a:xfrm>
+            <a:off x="5514814" y="5338127"/>
+            <a:ext cx="110131" cy="365797"/>
+          </a:xfrm>
+          <a:prstGeom prst="straightConnector1">
+            <a:avLst/>
+          </a:prstGeom>
+          <a:ln>
+            <a:tailEnd type="triangle"/>
+          </a:ln>
+        </p:spPr>
+        <p:style>
+          <a:lnRef idx="1">
+            <a:schemeClr val="accent1"/>
+          </a:lnRef>
+          <a:fillRef idx="0">
+            <a:schemeClr val="accent1"/>
+          </a:fillRef>
+          <a:effectRef idx="0">
+            <a:schemeClr val="accent1"/>
+          </a:effectRef>
+          <a:fontRef idx="minor">
+            <a:schemeClr val="tx1"/>
+          </a:fontRef>
+        </p:style>
+      </p:cxnSp>
+      <p:cxnSp>
+        <p:nvCxnSpPr>
+          <p:cNvPr id="65" name="直接箭头连接符 64">
+            <a:extLst>
+              <a:ext uri="{FF2B5EF4-FFF2-40B4-BE49-F238E27FC236}">
+                <a16:creationId xmlns:a16="http://schemas.microsoft.com/office/drawing/2014/main" id="{7E842F36-ADB9-30D0-FA66-FC31B94EA987}"/>
+              </a:ext>
+            </a:extLst>
+          </p:cNvPr>
+          <p:cNvCxnSpPr>
+            <a:cxnSpLocks/>
+            <a:stCxn id="44" idx="3"/>
+            <a:endCxn id="47" idx="0"/>
+          </p:cNvCxnSpPr>
+          <p:nvPr/>
+        </p:nvCxnSpPr>
+        <p:spPr>
+          <a:xfrm flipH="1">
+            <a:off x="6136937" y="5338126"/>
+            <a:ext cx="106783" cy="365798"/>
+          </a:xfrm>
+          <a:prstGeom prst="straightConnector1">
+            <a:avLst/>
+          </a:prstGeom>
+          <a:ln>
+            <a:tailEnd type="triangle"/>
+          </a:ln>
+        </p:spPr>
+        <p:style>
+          <a:lnRef idx="1">
+            <a:schemeClr val="accent1"/>
+          </a:lnRef>
+          <a:fillRef idx="0">
+            <a:schemeClr val="accent1"/>
+          </a:fillRef>
+          <a:effectRef idx="0">
+            <a:schemeClr val="accent1"/>
+          </a:effectRef>
+          <a:fontRef idx="minor">
+            <a:schemeClr val="tx1"/>
+          </a:fontRef>
+        </p:style>
+      </p:cxnSp>
+      <p:cxnSp>
+        <p:nvCxnSpPr>
+          <p:cNvPr id="68" name="直接箭头连接符 67">
+            <a:extLst>
+              <a:ext uri="{FF2B5EF4-FFF2-40B4-BE49-F238E27FC236}">
+                <a16:creationId xmlns:a16="http://schemas.microsoft.com/office/drawing/2014/main" id="{B02CB52C-90A2-02EE-B4DF-7B6601710DC8}"/>
+              </a:ext>
+            </a:extLst>
+          </p:cNvPr>
+          <p:cNvCxnSpPr>
+            <a:cxnSpLocks/>
+            <a:stCxn id="44" idx="5"/>
+            <a:endCxn id="48" idx="0"/>
+          </p:cNvCxnSpPr>
+          <p:nvPr/>
+        </p:nvCxnSpPr>
+        <p:spPr>
+          <a:xfrm>
+            <a:off x="6461667" y="5338126"/>
+            <a:ext cx="105391" cy="365798"/>
+          </a:xfrm>
+          <a:prstGeom prst="straightConnector1">
+            <a:avLst/>
+          </a:prstGeom>
+          <a:ln>
+            <a:tailEnd type="triangle"/>
+          </a:ln>
+        </p:spPr>
+        <p:style>
+          <a:lnRef idx="1">
+            <a:schemeClr val="accent1"/>
+          </a:lnRef>
+          <a:fillRef idx="0">
+            <a:schemeClr val="accent1"/>
+          </a:fillRef>
+          <a:effectRef idx="0">
+            <a:schemeClr val="accent1"/>
+          </a:effectRef>
+          <a:fontRef idx="minor">
+            <a:schemeClr val="tx1"/>
+          </a:fontRef>
+        </p:style>
+      </p:cxnSp>
+      <p:cxnSp>
+        <p:nvCxnSpPr>
+          <p:cNvPr id="76" name="连接符: 曲线 75">
+            <a:extLst>
+              <a:ext uri="{FF2B5EF4-FFF2-40B4-BE49-F238E27FC236}">
+                <a16:creationId xmlns:a16="http://schemas.microsoft.com/office/drawing/2014/main" id="{772BCF5D-1733-15D1-4B46-3FE4E7A31B07}"/>
+              </a:ext>
+            </a:extLst>
+          </p:cNvPr>
+          <p:cNvCxnSpPr>
+            <a:cxnSpLocks/>
+            <a:stCxn id="42" idx="2"/>
+          </p:cNvCxnSpPr>
+          <p:nvPr/>
+        </p:nvCxnSpPr>
+        <p:spPr>
+          <a:xfrm rot="10800000">
+            <a:off x="5243475" y="4068271"/>
+            <a:ext cx="482577" cy="640774"/>
+          </a:xfrm>
+          <a:prstGeom prst="curvedConnector2">
+            <a:avLst/>
+          </a:prstGeom>
+          <a:ln>
+            <a:prstDash val="sysDash"/>
+            <a:tailEnd type="triangle"/>
+          </a:ln>
+        </p:spPr>
+        <p:style>
+          <a:lnRef idx="1">
+            <a:schemeClr val="accent1"/>
+          </a:lnRef>
+          <a:fillRef idx="0">
+            <a:schemeClr val="accent1"/>
+          </a:fillRef>
+          <a:effectRef idx="0">
+            <a:schemeClr val="accent1"/>
+          </a:effectRef>
+          <a:fontRef idx="minor">
+            <a:schemeClr val="tx1"/>
+          </a:fontRef>
+        </p:style>
+      </p:cxnSp>
+      <p:sp>
+        <p:nvSpPr>
+          <p:cNvPr id="77" name="椭圆 76">
+            <a:extLst>
+              <a:ext uri="{FF2B5EF4-FFF2-40B4-BE49-F238E27FC236}">
+                <a16:creationId xmlns:a16="http://schemas.microsoft.com/office/drawing/2014/main" id="{3B3582AB-E78E-B8B3-4A73-C40DED504DAA}"/>
+              </a:ext>
+            </a:extLst>
+          </p:cNvPr>
+          <p:cNvSpPr/>
+          <p:nvPr/>
+        </p:nvSpPr>
+        <p:spPr>
+          <a:xfrm>
+            <a:off x="7017073" y="5690336"/>
+            <a:ext cx="308225" cy="308225"/>
+          </a:xfrm>
+          <a:prstGeom prst="ellipse">
+            <a:avLst/>
+          </a:prstGeom>
+          <a:solidFill>
+            <a:srgbClr val="FFC000"/>
+          </a:solidFill>
+        </p:spPr>
+        <p:style>
+          <a:lnRef idx="2">
+            <a:schemeClr val="accent1">
+              <a:shade val="15000"/>
+            </a:schemeClr>
+          </a:lnRef>
+          <a:fillRef idx="1">
+            <a:schemeClr val="accent1"/>
+          </a:fillRef>
+          <a:effectRef idx="0">
+            <a:schemeClr val="accent1"/>
+          </a:effectRef>
+          <a:fontRef idx="minor">
+            <a:schemeClr val="lt1"/>
+          </a:fontRef>
+        </p:style>
+        <p:txBody>
+          <a:bodyPr rtlCol="0" anchor="ctr"/>
+          <a:lstStyle/>
+          <a:p>
+            <a:pPr algn="ctr"/>
+            <a:endParaRPr lang="zh-CN" altLang="en-US"/>
+          </a:p>
+        </p:txBody>
+      </p:sp>
+      <p:cxnSp>
+        <p:nvCxnSpPr>
+          <p:cNvPr id="79" name="连接符: 曲线 78">
+            <a:extLst>
+              <a:ext uri="{FF2B5EF4-FFF2-40B4-BE49-F238E27FC236}">
+                <a16:creationId xmlns:a16="http://schemas.microsoft.com/office/drawing/2014/main" id="{3768C4D7-FBE8-7CCA-814C-FB2230941E65}"/>
+              </a:ext>
+            </a:extLst>
+          </p:cNvPr>
+          <p:cNvCxnSpPr>
+            <a:cxnSpLocks/>
+            <a:stCxn id="77" idx="0"/>
+          </p:cNvCxnSpPr>
+          <p:nvPr/>
+        </p:nvCxnSpPr>
+        <p:spPr>
+          <a:xfrm rot="16200000" flipV="1">
+            <a:off x="5566722" y="4085872"/>
+            <a:ext cx="1617550" cy="1591378"/>
+          </a:xfrm>
+          <a:prstGeom prst="curvedConnector3">
+            <a:avLst>
+              <a:gd name="adj1" fmla="val 67785"/>
+            </a:avLst>
+          </a:prstGeom>
+          <a:ln>
+            <a:prstDash val="sysDash"/>
+            <a:tailEnd type="triangle"/>
+          </a:ln>
+        </p:spPr>
+        <p:style>
+          <a:lnRef idx="1">
+            <a:schemeClr val="accent1"/>
+          </a:lnRef>
+          <a:fillRef idx="0">
+            <a:schemeClr val="accent1"/>
+          </a:fillRef>
+          <a:effectRef idx="0">
+            <a:schemeClr val="accent1"/>
+          </a:effectRef>
+          <a:fontRef idx="minor">
+            <a:schemeClr val="tx1"/>
+          </a:fontRef>
+        </p:style>
+      </p:cxnSp>
+      <p:sp>
+        <p:nvSpPr>
+          <p:cNvPr id="83" name="文本框 82">
+            <a:extLst>
+              <a:ext uri="{FF2B5EF4-FFF2-40B4-BE49-F238E27FC236}">
+                <a16:creationId xmlns:a16="http://schemas.microsoft.com/office/drawing/2014/main" id="{8DEB7526-AB77-8466-B3A2-9E83EB699145}"/>
+              </a:ext>
+            </a:extLst>
+          </p:cNvPr>
+          <p:cNvSpPr txBox="1"/>
+          <p:nvPr/>
+        </p:nvSpPr>
+        <p:spPr>
+          <a:xfrm>
+            <a:off x="688369" y="3659918"/>
+            <a:ext cx="3782606" cy="2308324"/>
+          </a:xfrm>
+          <a:prstGeom prst="rect">
+            <a:avLst/>
+          </a:prstGeom>
+          <a:noFill/>
+        </p:spPr>
+        <p:txBody>
+          <a:bodyPr wrap="square" rtlCol="0">
+            <a:spAutoFit/>
+          </a:bodyPr>
+          <a:lstStyle/>
+          <a:p>
+            <a:r>
+              <a:rPr lang="en-US" altLang="zh-CN" dirty="0" err="1"/>
+              <a:t>Vchain</a:t>
+            </a:r>
+            <a:r>
+              <a:rPr lang="en-US" altLang="zh-CN" dirty="0"/>
+              <a:t>: </a:t>
+            </a:r>
+            <a:r>
+              <a:rPr lang="zh-CN" altLang="en-US" dirty="0"/>
+              <a:t>二叉树</a:t>
+            </a:r>
+            <a:r>
+              <a:rPr lang="en-US" altLang="zh-CN" dirty="0"/>
+              <a:t>+Accumulator</a:t>
+            </a:r>
+          </a:p>
+          <a:p>
+            <a:r>
+              <a:rPr lang="zh-CN" altLang="en-US" dirty="0"/>
+              <a:t>根节点目录：保存所有树的根节点</a:t>
+            </a:r>
+            <a:endParaRPr lang="en-US" altLang="zh-CN" dirty="0"/>
+          </a:p>
+          <a:p>
+            <a:r>
+              <a:rPr lang="zh-CN" altLang="en-US" dirty="0"/>
+              <a:t>叶子节点：</a:t>
+            </a:r>
+            <a:r>
+              <a:rPr lang="en-US" altLang="zh-CN" dirty="0"/>
+              <a:t>&lt;hash(&lt;k1,fid&gt;),k1,Acc&gt;</a:t>
+            </a:r>
+          </a:p>
+          <a:p>
+            <a:r>
+              <a:rPr lang="zh-CN" altLang="en-US" dirty="0"/>
+              <a:t>中间节点：</a:t>
+            </a:r>
+            <a:r>
+              <a:rPr lang="en-US" altLang="zh-CN" dirty="0"/>
+              <a:t>&lt;hash(</a:t>
+            </a:r>
+            <a:r>
+              <a:rPr lang="en-US" altLang="zh-CN" dirty="0" err="1"/>
+              <a:t>childs</a:t>
+            </a:r>
+            <a:r>
+              <a:rPr lang="en-US" altLang="zh-CN" dirty="0"/>
+              <a:t>),{k},Acc&gt;</a:t>
+            </a:r>
+            <a:r>
+              <a:rPr lang="zh-CN" altLang="en-US" dirty="0"/>
+              <a:t>，包含所有子节点的关键词，并写入</a:t>
+            </a:r>
+            <a:r>
+              <a:rPr lang="en-US" altLang="zh-CN" dirty="0"/>
+              <a:t>Acc</a:t>
+            </a:r>
+            <a:r>
+              <a:rPr lang="zh-CN" altLang="en-US" dirty="0"/>
+              <a:t>中。</a:t>
+            </a:r>
+            <a:endParaRPr lang="en-US" altLang="zh-CN" dirty="0"/>
+          </a:p>
+          <a:p>
+            <a:r>
+              <a:rPr lang="zh-CN" altLang="en-US"/>
+              <a:t>自下而上构建，两两配对后生成父节点，所有树的根节点放进目录中。</a:t>
+            </a:r>
+            <a:endParaRPr lang="zh-CN" altLang="en-US" dirty="0"/>
+          </a:p>
+        </p:txBody>
+      </p:sp>
+    </p:spTree>
+    <p:extLst>
+      <p:ext uri="{BB962C8B-B14F-4D97-AF65-F5344CB8AC3E}">
+        <p14:creationId xmlns:p14="http://schemas.microsoft.com/office/powerpoint/2010/main" val="2000259348"/>
+      </p:ext>
+    </p:extLst>
+  </p:cSld>
+  <p:clrMapOvr>
+    <a:masterClrMapping/>
+  </p:clrMapOvr>
+</p:sld>
+</file>
+
 <file path=ppt/theme/theme1.xml><?xml version="1.0" encoding="utf-8"?>
 <a:theme xmlns:a="http://schemas.openxmlformats.org/drawingml/2006/main" name="Office 主题​​">
   <a:themeElements>
